--- a/documentation/PWM_DC_Motor_Control_Presentation_v2.pptx
+++ b/documentation/PWM_DC_Motor_Control_Presentation_v2.pptx
@@ -79,29 +79,7 @@
                 <a:uFillTx/>
                 <a:latin typeface="Calibri"/>
               </a:rPr>
-              <a:t>Click to </a:t>
-            </a:r>
-            <a:r>
-              <a:rPr lang="en-GB" sz="1800" b="0" u="none" strike="noStrike">
-                <a:solidFill>
-                  <a:schemeClr val="dk1"/>
-                </a:solidFill>
-                <a:effectLst/>
-                <a:uFillTx/>
-                <a:latin typeface="Calibri"/>
-              </a:rPr>
-              <a:t>move the </a:t>
-            </a:r>
-            <a:r>
-              <a:rPr lang="en-GB" sz="1800" b="0" u="none" strike="noStrike">
-                <a:solidFill>
-                  <a:schemeClr val="dk1"/>
-                </a:solidFill>
-                <a:effectLst/>
-                <a:uFillTx/>
-                <a:latin typeface="Calibri"/>
-              </a:rPr>
-              <a:t>slide</a:t>
+              <a:t>Click to move the slide</a:t>
             </a:r>
             <a:endParaRPr lang="en-GB" sz="1800" b="0" u="none" strike="noStrike">
               <a:solidFill>
@@ -154,40 +132,7 @@
                 <a:uFillTx/>
                 <a:latin typeface="Arial"/>
               </a:rPr>
-              <a:t>Click to </a:t>
-            </a:r>
-            <a:r>
-              <a:rPr lang="en-GB" sz="2000" b="0" u="none" strike="noStrike">
-                <a:solidFill>
-                  <a:srgbClr val="000000"/>
-                </a:solidFill>
-                <a:effectLst/>
-                <a:uFillTx/>
-                <a:latin typeface="Arial"/>
-              </a:rPr>
-              <a:t>edit the </a:t>
-            </a:r>
-            <a:r>
-              <a:rPr lang="en-GB" sz="2000" b="0" u="none" strike="noStrike">
-                <a:solidFill>
-                  <a:srgbClr val="000000"/>
-                </a:solidFill>
-                <a:effectLst/>
-                <a:uFillTx/>
-                <a:latin typeface="Arial"/>
-              </a:rPr>
-              <a:t>notes </a:t>
-            </a:r>
-            <a:r>
-              <a:rPr lang="en-GB" sz="2000" b="0" u="none" strike="noStrike">
-                <a:solidFill>
-                  <a:srgbClr val="000000"/>
-                </a:solidFill>
-                <a:effectLst/>
-                <a:uFillTx/>
-                <a:latin typeface="Arial"/>
-              </a:rPr>
-              <a:t>format</a:t>
+              <a:t>Click to edit the notes format</a:t>
             </a:r>
             <a:endParaRPr lang="en-GB" sz="2000" b="0" u="none" strike="noStrike">
               <a:solidFill>
@@ -429,7 +374,7 @@
             <a:pPr indent="0" algn="r">
               <a:buNone/>
             </a:pPr>
-            <a:fld id="{5979BB8B-DA8C-4AC1-A157-5C7AA38AE135}" type="slidenum">
+            <a:fld id="{8EE4EF96-D45B-41F0-897C-E48C401D0990}" type="slidenum">
               <a:rPr lang="en-GB" sz="1400" b="0" u="none" strike="noStrike">
                 <a:solidFill>
                   <a:srgbClr val="000000"/>
@@ -487,7 +432,7 @@
         <p:spPr>
           <a:xfrm>
             <a:off x="685800" y="1143000"/>
-            <a:ext cx="5485680" cy="3085560"/>
+            <a:ext cx="5485320" cy="3085200"/>
           </a:xfrm>
           <a:prstGeom prst="rect">
             <a:avLst/>
@@ -510,7 +455,7 @@
         <p:spPr>
           <a:xfrm>
             <a:off x="685800" y="4400640"/>
-            <a:ext cx="5485680" cy="3599640"/>
+            <a:ext cx="5485320" cy="3599280"/>
           </a:xfrm>
           <a:prstGeom prst="rect">
             <a:avLst/>
@@ -552,7 +497,7 @@
         <p:spPr>
           <a:xfrm>
             <a:off x="3884760" y="8685360"/>
-            <a:ext cx="2971080" cy="457920"/>
+            <a:ext cx="2970720" cy="457560"/>
           </a:xfrm>
           <a:prstGeom prst="rect">
             <a:avLst/>
@@ -596,7 +541,7 @@
                 <a:tab pos="0" algn="l"/>
               </a:tabLst>
             </a:pPr>
-            <a:fld id="{AAFED353-2886-4B02-9700-F8D5613C0F9C}" type="slidenum">
+            <a:fld id="{AFB5A0BA-A226-4B02-A2C9-AED7EA1385DA}" type="slidenum">
               <a:rPr lang="en-US" sz="1200" b="0" u="none" strike="noStrike">
                 <a:solidFill>
                   <a:schemeClr val="dk1"/>
@@ -654,7 +599,7 @@
         <p:spPr>
           <a:xfrm>
             <a:off x="685800" y="1143000"/>
-            <a:ext cx="5485680" cy="3085560"/>
+            <a:ext cx="5485320" cy="3085200"/>
           </a:xfrm>
           <a:prstGeom prst="rect">
             <a:avLst/>
@@ -677,7 +622,7 @@
         <p:spPr>
           <a:xfrm>
             <a:off x="685800" y="4400640"/>
-            <a:ext cx="5485680" cy="3599640"/>
+            <a:ext cx="5485320" cy="3599280"/>
           </a:xfrm>
           <a:prstGeom prst="rect">
             <a:avLst/>
@@ -736,7 +681,7 @@
         <p:spPr>
           <a:xfrm>
             <a:off x="3884760" y="8685360"/>
-            <a:ext cx="2971080" cy="457920"/>
+            <a:ext cx="2970720" cy="457560"/>
           </a:xfrm>
           <a:prstGeom prst="rect">
             <a:avLst/>
@@ -780,7 +725,7 @@
                 <a:tab pos="0" algn="l"/>
               </a:tabLst>
             </a:pPr>
-            <a:fld id="{31584504-06B5-4F98-ADEA-E52D5A174E40}" type="slidenum">
+            <a:fld id="{F1B15F5B-B744-470A-97D1-065A2FB43132}" type="slidenum">
               <a:rPr lang="en-US" sz="1200" b="0" u="none" strike="noStrike">
                 <a:solidFill>
                   <a:schemeClr val="dk1"/>
@@ -838,7 +783,7 @@
         <p:spPr>
           <a:xfrm>
             <a:off x="685800" y="1143000"/>
-            <a:ext cx="5485680" cy="3085560"/>
+            <a:ext cx="5485320" cy="3085200"/>
           </a:xfrm>
           <a:prstGeom prst="rect">
             <a:avLst/>
@@ -861,7 +806,7 @@
         <p:spPr>
           <a:xfrm>
             <a:off x="685800" y="4400640"/>
-            <a:ext cx="5485680" cy="3599640"/>
+            <a:ext cx="5485320" cy="3599280"/>
           </a:xfrm>
           <a:prstGeom prst="rect">
             <a:avLst/>
@@ -920,7 +865,7 @@
         <p:spPr>
           <a:xfrm>
             <a:off x="3884760" y="8685360"/>
-            <a:ext cx="2971080" cy="457920"/>
+            <a:ext cx="2970720" cy="457560"/>
           </a:xfrm>
           <a:prstGeom prst="rect">
             <a:avLst/>
@@ -964,7 +909,7 @@
                 <a:tab pos="0" algn="l"/>
               </a:tabLst>
             </a:pPr>
-            <a:fld id="{00FD10B4-BE4E-4E35-BBE2-6E43D533F425}" type="slidenum">
+            <a:fld id="{CEA1CC12-562A-4FA2-A2E0-645CA1041635}" type="slidenum">
               <a:rPr lang="en-US" sz="1200" b="0" u="none" strike="noStrike">
                 <a:solidFill>
                   <a:schemeClr val="dk1"/>
@@ -974,7 +919,7 @@
                 <a:latin typeface="+mn-lt"/>
                 <a:ea typeface="+mn-ea"/>
               </a:rPr>
-              <a:t>1</a:t>
+              <a:t>&lt;number&gt;</a:t>
             </a:fld>
             <a:endParaRPr lang="en-GB" sz="1200" b="0" u="none" strike="noStrike">
               <a:solidFill>
@@ -1022,7 +967,7 @@
         <p:spPr>
           <a:xfrm>
             <a:off x="685800" y="1143000"/>
-            <a:ext cx="5485680" cy="3085560"/>
+            <a:ext cx="5485320" cy="3085200"/>
           </a:xfrm>
           <a:prstGeom prst="rect">
             <a:avLst/>
@@ -1045,7 +990,7 @@
         <p:spPr>
           <a:xfrm>
             <a:off x="685800" y="4400640"/>
-            <a:ext cx="5485680" cy="3599640"/>
+            <a:ext cx="5485320" cy="3599280"/>
           </a:xfrm>
           <a:prstGeom prst="rect">
             <a:avLst/>
@@ -1104,7 +1049,7 @@
         <p:spPr>
           <a:xfrm>
             <a:off x="3884760" y="8685360"/>
-            <a:ext cx="2971080" cy="457920"/>
+            <a:ext cx="2970720" cy="457560"/>
           </a:xfrm>
           <a:prstGeom prst="rect">
             <a:avLst/>
@@ -1148,7 +1093,7 @@
                 <a:tab pos="0" algn="l"/>
               </a:tabLst>
             </a:pPr>
-            <a:fld id="{4C47D95E-210B-4DB5-B22D-0D3E254218BD}" type="slidenum">
+            <a:fld id="{F148AA5E-5990-463C-9AAB-D6BA3FE2A18D}" type="slidenum">
               <a:rPr lang="en-US" sz="1200" b="0" u="none" strike="noStrike">
                 <a:solidFill>
                   <a:schemeClr val="dk1"/>
@@ -1206,7 +1151,7 @@
         <p:spPr>
           <a:xfrm>
             <a:off x="685800" y="1143000"/>
-            <a:ext cx="5485680" cy="3085560"/>
+            <a:ext cx="5485320" cy="3085200"/>
           </a:xfrm>
           <a:prstGeom prst="rect">
             <a:avLst/>
@@ -1229,7 +1174,7 @@
         <p:spPr>
           <a:xfrm>
             <a:off x="685800" y="4400640"/>
-            <a:ext cx="5485680" cy="3599640"/>
+            <a:ext cx="5485320" cy="3599280"/>
           </a:xfrm>
           <a:prstGeom prst="rect">
             <a:avLst/>
@@ -1288,7 +1233,7 @@
         <p:spPr>
           <a:xfrm>
             <a:off x="3884760" y="8685360"/>
-            <a:ext cx="2971080" cy="457920"/>
+            <a:ext cx="2970720" cy="457560"/>
           </a:xfrm>
           <a:prstGeom prst="rect">
             <a:avLst/>
@@ -1332,7 +1277,7 @@
                 <a:tab pos="0" algn="l"/>
               </a:tabLst>
             </a:pPr>
-            <a:fld id="{8BC8A0B8-EF34-41F8-A22D-05496082B127}" type="slidenum">
+            <a:fld id="{7888E9BC-91FC-471D-AA7F-B6E03235F52E}" type="slidenum">
               <a:rPr lang="en-US" sz="1200" b="0" u="none" strike="noStrike">
                 <a:solidFill>
                   <a:schemeClr val="dk1"/>
@@ -1390,7 +1335,7 @@
         <p:spPr>
           <a:xfrm>
             <a:off x="685800" y="1143000"/>
-            <a:ext cx="5485680" cy="3085560"/>
+            <a:ext cx="5485320" cy="3085200"/>
           </a:xfrm>
           <a:prstGeom prst="rect">
             <a:avLst/>
@@ -1413,7 +1358,7 @@
         <p:spPr>
           <a:xfrm>
             <a:off x="685800" y="4400640"/>
-            <a:ext cx="5485680" cy="3599640"/>
+            <a:ext cx="5485320" cy="3599280"/>
           </a:xfrm>
           <a:prstGeom prst="rect">
             <a:avLst/>
@@ -1472,7 +1417,7 @@
         <p:spPr>
           <a:xfrm>
             <a:off x="3884760" y="8685360"/>
-            <a:ext cx="2971080" cy="457920"/>
+            <a:ext cx="2970720" cy="457560"/>
           </a:xfrm>
           <a:prstGeom prst="rect">
             <a:avLst/>
@@ -1516,7 +1461,7 @@
                 <a:tab pos="0" algn="l"/>
               </a:tabLst>
             </a:pPr>
-            <a:fld id="{643A4373-0482-4F6C-B82D-56CC0F3464F6}" type="slidenum">
+            <a:fld id="{742C81B2-906A-4930-965B-5E507ACCBA51}" type="slidenum">
               <a:rPr lang="en-US" sz="1200" b="0" u="none" strike="noStrike">
                 <a:solidFill>
                   <a:schemeClr val="dk1"/>
@@ -1574,7 +1519,7 @@
         <p:spPr>
           <a:xfrm>
             <a:off x="685800" y="1143000"/>
-            <a:ext cx="5485680" cy="3085560"/>
+            <a:ext cx="5485320" cy="3085200"/>
           </a:xfrm>
           <a:prstGeom prst="rect">
             <a:avLst/>
@@ -1597,7 +1542,7 @@
         <p:spPr>
           <a:xfrm>
             <a:off x="685800" y="4400640"/>
-            <a:ext cx="5485680" cy="3599640"/>
+            <a:ext cx="5485320" cy="3599280"/>
           </a:xfrm>
           <a:prstGeom prst="rect">
             <a:avLst/>
@@ -1656,7 +1601,7 @@
         <p:spPr>
           <a:xfrm>
             <a:off x="3884760" y="8685360"/>
-            <a:ext cx="2971080" cy="457920"/>
+            <a:ext cx="2970720" cy="457560"/>
           </a:xfrm>
           <a:prstGeom prst="rect">
             <a:avLst/>
@@ -1700,7 +1645,7 @@
                 <a:tab pos="0" algn="l"/>
               </a:tabLst>
             </a:pPr>
-            <a:fld id="{5C51E0EC-228B-4C81-9C1D-003868A1CE45}" type="slidenum">
+            <a:fld id="{18817EAB-BAD3-4B67-AEDF-06BBBAF860EE}" type="slidenum">
               <a:rPr lang="en-US" sz="1200" b="0" u="none" strike="noStrike">
                 <a:solidFill>
                   <a:schemeClr val="dk1"/>
@@ -1758,7 +1703,7 @@
         <p:spPr>
           <a:xfrm>
             <a:off x="685800" y="1143000"/>
-            <a:ext cx="5485680" cy="3085560"/>
+            <a:ext cx="5485320" cy="3085200"/>
           </a:xfrm>
           <a:prstGeom prst="rect">
             <a:avLst/>
@@ -1781,7 +1726,7 @@
         <p:spPr>
           <a:xfrm>
             <a:off x="685800" y="4400640"/>
-            <a:ext cx="5485680" cy="3599640"/>
+            <a:ext cx="5485320" cy="3599280"/>
           </a:xfrm>
           <a:prstGeom prst="rect">
             <a:avLst/>
@@ -1840,7 +1785,7 @@
         <p:spPr>
           <a:xfrm>
             <a:off x="3884760" y="8685360"/>
-            <a:ext cx="2971080" cy="457920"/>
+            <a:ext cx="2970720" cy="457560"/>
           </a:xfrm>
           <a:prstGeom prst="rect">
             <a:avLst/>
@@ -1884,7 +1829,7 @@
                 <a:tab pos="0" algn="l"/>
               </a:tabLst>
             </a:pPr>
-            <a:fld id="{52795E4F-9D43-4E18-9708-FCC1491398CD}" type="slidenum">
+            <a:fld id="{2599BBFC-2D5C-4A9F-9974-7B236CA5610B}" type="slidenum">
               <a:rPr lang="en-US" sz="1200" b="0" u="none" strike="noStrike">
                 <a:solidFill>
                   <a:schemeClr val="dk1"/>
@@ -1942,7 +1887,7 @@
         <p:spPr>
           <a:xfrm>
             <a:off x="685800" y="1143000"/>
-            <a:ext cx="5485680" cy="3085560"/>
+            <a:ext cx="5485320" cy="3085200"/>
           </a:xfrm>
           <a:prstGeom prst="rect">
             <a:avLst/>
@@ -1965,7 +1910,7 @@
         <p:spPr>
           <a:xfrm>
             <a:off x="685800" y="4400640"/>
-            <a:ext cx="5485680" cy="3599640"/>
+            <a:ext cx="5485320" cy="3599280"/>
           </a:xfrm>
           <a:prstGeom prst="rect">
             <a:avLst/>
@@ -2024,7 +1969,7 @@
         <p:spPr>
           <a:xfrm>
             <a:off x="3884760" y="8685360"/>
-            <a:ext cx="2971080" cy="457920"/>
+            <a:ext cx="2970720" cy="457560"/>
           </a:xfrm>
           <a:prstGeom prst="rect">
             <a:avLst/>
@@ -2068,7 +2013,7 @@
                 <a:tab pos="0" algn="l"/>
               </a:tabLst>
             </a:pPr>
-            <a:fld id="{ADCC3991-1307-4BAD-A159-2FA11BE33883}" type="slidenum">
+            <a:fld id="{B5B0BB70-5D2A-4582-816B-6183C71C93C6}" type="slidenum">
               <a:rPr lang="en-US" sz="1200" b="0" u="none" strike="noStrike">
                 <a:solidFill>
                   <a:schemeClr val="dk1"/>
@@ -2126,7 +2071,7 @@
         <p:spPr>
           <a:xfrm>
             <a:off x="685800" y="1143000"/>
-            <a:ext cx="5485680" cy="3085560"/>
+            <a:ext cx="5485320" cy="3085200"/>
           </a:xfrm>
           <a:prstGeom prst="rect">
             <a:avLst/>
@@ -2149,7 +2094,7 @@
         <p:spPr>
           <a:xfrm>
             <a:off x="685800" y="4400640"/>
-            <a:ext cx="5485680" cy="3599640"/>
+            <a:ext cx="5485320" cy="3599280"/>
           </a:xfrm>
           <a:prstGeom prst="rect">
             <a:avLst/>
@@ -2208,7 +2153,7 @@
         <p:spPr>
           <a:xfrm>
             <a:off x="3884760" y="8685360"/>
-            <a:ext cx="2971080" cy="457920"/>
+            <a:ext cx="2970720" cy="457560"/>
           </a:xfrm>
           <a:prstGeom prst="rect">
             <a:avLst/>
@@ -2252,7 +2197,7 @@
                 <a:tab pos="0" algn="l"/>
               </a:tabLst>
             </a:pPr>
-            <a:fld id="{20DE8FA8-DE9C-4E75-9F2E-27064E8D4981}" type="slidenum">
+            <a:fld id="{EEEC52F4-36D9-41F8-84E0-08EBBF065B2C}" type="slidenum">
               <a:rPr lang="en-US" sz="1200" b="0" u="none" strike="noStrike">
                 <a:solidFill>
                   <a:schemeClr val="dk1"/>
@@ -2310,7 +2255,7 @@
         <p:spPr>
           <a:xfrm>
             <a:off x="685800" y="1143000"/>
-            <a:ext cx="5485680" cy="3085560"/>
+            <a:ext cx="5485320" cy="3085200"/>
           </a:xfrm>
           <a:prstGeom prst="rect">
             <a:avLst/>
@@ -2333,7 +2278,7 @@
         <p:spPr>
           <a:xfrm>
             <a:off x="685800" y="4400640"/>
-            <a:ext cx="5485680" cy="3599640"/>
+            <a:ext cx="5485320" cy="3599280"/>
           </a:xfrm>
           <a:prstGeom prst="rect">
             <a:avLst/>
@@ -2392,7 +2337,7 @@
         <p:spPr>
           <a:xfrm>
             <a:off x="3884760" y="8685360"/>
-            <a:ext cx="2971080" cy="457920"/>
+            <a:ext cx="2970720" cy="457560"/>
           </a:xfrm>
           <a:prstGeom prst="rect">
             <a:avLst/>
@@ -2436,7 +2381,7 @@
                 <a:tab pos="0" algn="l"/>
               </a:tabLst>
             </a:pPr>
-            <a:fld id="{CF5F019E-80AD-4CF7-A84E-F6031E46BDFC}" type="slidenum">
+            <a:fld id="{5A31D546-948A-4A4F-BA4B-85DDF61B9120}" type="slidenum">
               <a:rPr lang="en-US" sz="1200" b="0" u="none" strike="noStrike">
                 <a:solidFill>
                   <a:schemeClr val="dk1"/>
@@ -2569,29 +2514,7 @@
                 <a:uFillTx/>
                 <a:latin typeface="Calibri"/>
               </a:rPr>
-              <a:t>Click to edit </a:t>
-            </a:r>
-            <a:r>
-              <a:rPr lang="en-GB" sz="1800" b="0" u="none" strike="noStrike">
-                <a:solidFill>
-                  <a:schemeClr val="dk1"/>
-                </a:solidFill>
-                <a:effectLst/>
-                <a:uFillTx/>
-                <a:latin typeface="Calibri"/>
-              </a:rPr>
-              <a:t>the title text </a:t>
-            </a:r>
-            <a:r>
-              <a:rPr lang="en-GB" sz="1800" b="0" u="none" strike="noStrike">
-                <a:solidFill>
-                  <a:schemeClr val="dk1"/>
-                </a:solidFill>
-                <a:effectLst/>
-                <a:uFillTx/>
-                <a:latin typeface="Calibri"/>
-              </a:rPr>
-              <a:t>format</a:t>
+              <a:t>Click to edit the title text format</a:t>
             </a:r>
             <a:endParaRPr lang="en-GB" sz="1800" b="0" u="none" strike="noStrike">
               <a:solidFill>
@@ -3034,7 +2957,7 @@
         <p:spPr>
           <a:xfrm>
             <a:off x="502920" y="1005840"/>
-            <a:ext cx="2010960" cy="346680"/>
+            <a:ext cx="2010600" cy="346320"/>
           </a:xfrm>
           <a:prstGeom prst="rect">
             <a:avLst/>
@@ -3095,7 +3018,7 @@
         <p:spPr>
           <a:xfrm>
             <a:off x="1131120" y="606960"/>
-            <a:ext cx="8228880" cy="776520"/>
+            <a:ext cx="8228520" cy="776160"/>
           </a:xfrm>
           <a:prstGeom prst="rect">
             <a:avLst/>
@@ -3134,79 +3057,7 @@
                 <a:latin typeface="Arial"/>
                 <a:ea typeface="Arial"/>
               </a:rPr>
-              <a:t>PW</a:t>
-            </a:r>
-            <a:r>
-              <a:rPr lang="en-US" sz="4200" b="1" u="none" strike="noStrike">
-                <a:solidFill>
-                  <a:srgbClr val="FFFFFF"/>
-                </a:solidFill>
-                <a:effectLst/>
-                <a:uFillTx/>
-                <a:latin typeface="Arial"/>
-                <a:ea typeface="Arial"/>
-              </a:rPr>
-              <a:t>M-</a:t>
-            </a:r>
-            <a:r>
-              <a:rPr lang="en-US" sz="4200" b="1" u="none" strike="noStrike">
-                <a:solidFill>
-                  <a:srgbClr val="FFFFFF"/>
-                </a:solidFill>
-                <a:effectLst/>
-                <a:uFillTx/>
-                <a:latin typeface="Arial"/>
-                <a:ea typeface="Arial"/>
-              </a:rPr>
-              <a:t>Bas</a:t>
-            </a:r>
-            <a:r>
-              <a:rPr lang="en-US" sz="4200" b="1" u="none" strike="noStrike">
-                <a:solidFill>
-                  <a:srgbClr val="FFFFFF"/>
-                </a:solidFill>
-                <a:effectLst/>
-                <a:uFillTx/>
-                <a:latin typeface="Arial"/>
-                <a:ea typeface="Arial"/>
-              </a:rPr>
-              <a:t>ed </a:t>
-            </a:r>
-            <a:r>
-              <a:rPr lang="en-US" sz="4200" b="1" u="none" strike="noStrike">
-                <a:solidFill>
-                  <a:srgbClr val="FFFFFF"/>
-                </a:solidFill>
-                <a:effectLst/>
-                <a:uFillTx/>
-                <a:latin typeface="Arial"/>
-                <a:ea typeface="Arial"/>
-              </a:rPr>
-              <a:t>DC </a:t>
-            </a:r>
-            <a:r>
-              <a:rPr lang="en-US" sz="4200" b="1" u="none" strike="noStrike">
-                <a:solidFill>
-                  <a:srgbClr val="FFFFFF"/>
-                </a:solidFill>
-                <a:effectLst/>
-                <a:uFillTx/>
-                <a:latin typeface="Arial"/>
-                <a:ea typeface="Arial"/>
-              </a:rPr>
-              <a:t>Mot</a:t>
-            </a:r>
-            <a:r>
-              <a:rPr lang="en-US" sz="4200" b="1" u="none" strike="noStrike">
-                <a:solidFill>
-                  <a:srgbClr val="FFFFFF"/>
-                </a:solidFill>
-                <a:effectLst/>
-                <a:uFillTx/>
-                <a:latin typeface="Arial"/>
-                <a:ea typeface="Arial"/>
-              </a:rPr>
-              <a:t>or</a:t>
+              <a:t>PWM-Based DC Motor</a:t>
             </a:r>
             <a:endParaRPr lang="en-GB" sz="4200" b="0" u="none" strike="noStrike">
               <a:solidFill>
@@ -3228,7 +3079,7 @@
         <p:spPr>
           <a:xfrm>
             <a:off x="1080000" y="1383480"/>
-            <a:ext cx="8228880" cy="776520"/>
+            <a:ext cx="8228520" cy="776160"/>
           </a:xfrm>
           <a:prstGeom prst="rect">
             <a:avLst/>
@@ -3267,67 +3118,7 @@
                 <a:latin typeface="Arial"/>
                 <a:ea typeface="Arial"/>
               </a:rPr>
-              <a:t>Spe</a:t>
-            </a:r>
-            <a:r>
-              <a:rPr lang="en-US" sz="4200" b="1" u="none" strike="noStrike">
-                <a:solidFill>
-                  <a:srgbClr val="00B4D8"/>
-                </a:solidFill>
-                <a:effectLst/>
-                <a:uFillTx/>
-                <a:latin typeface="Arial"/>
-                <a:ea typeface="Arial"/>
-              </a:rPr>
-              <a:t>ed </a:t>
-            </a:r>
-            <a:r>
-              <a:rPr lang="en-US" sz="4200" b="1" u="none" strike="noStrike">
-                <a:solidFill>
-                  <a:srgbClr val="00B4D8"/>
-                </a:solidFill>
-                <a:effectLst/>
-                <a:uFillTx/>
-                <a:latin typeface="Arial"/>
-                <a:ea typeface="Arial"/>
-              </a:rPr>
-              <a:t>Con</a:t>
-            </a:r>
-            <a:r>
-              <a:rPr lang="en-US" sz="4200" b="1" u="none" strike="noStrike">
-                <a:solidFill>
-                  <a:srgbClr val="00B4D8"/>
-                </a:solidFill>
-                <a:effectLst/>
-                <a:uFillTx/>
-                <a:latin typeface="Arial"/>
-                <a:ea typeface="Arial"/>
-              </a:rPr>
-              <a:t>trol </a:t>
-            </a:r>
-            <a:r>
-              <a:rPr lang="en-US" sz="4200" b="1" u="none" strike="noStrike">
-                <a:solidFill>
-                  <a:srgbClr val="00B4D8"/>
-                </a:solidFill>
-                <a:effectLst/>
-                <a:uFillTx/>
-                <a:latin typeface="Arial"/>
-                <a:ea typeface="Arial"/>
-              </a:rPr>
-              <a:t>Syst</a:t>
-            </a:r>
-            <a:r>
-              <a:rPr lang="en-US" sz="4200" b="1" u="none" strike="noStrike">
-                <a:solidFill>
-                  <a:srgbClr val="00B4D8"/>
-                </a:solidFill>
-                <a:effectLst/>
-                <a:uFillTx/>
-                <a:latin typeface="Arial"/>
-                <a:ea typeface="Arial"/>
-              </a:rPr>
-              <a:t>em</a:t>
+              <a:t>Speed Control System</a:t>
             </a:r>
             <a:endParaRPr lang="en-GB" sz="4200" b="0" u="none" strike="noStrike">
               <a:solidFill>
@@ -3349,7 +3140,7 @@
         <p:spPr>
           <a:xfrm>
             <a:off x="3139920" y="2560680"/>
-            <a:ext cx="6400080" cy="319320"/>
+            <a:ext cx="6399720" cy="318960"/>
           </a:xfrm>
           <a:prstGeom prst="rect">
             <a:avLst/>
@@ -3388,19 +3179,7 @@
                 <a:latin typeface="Arial"/>
                 <a:ea typeface="Arial"/>
               </a:rPr>
-              <a:t>GROUP NO </a:t>
-            </a:r>
-            <a:r>
-              <a:rPr lang="en-US" sz="1400" b="0" u="none" strike="noStrike">
-                <a:solidFill>
-                  <a:srgbClr val="B0C4D8"/>
-                </a:solidFill>
-                <a:effectLst/>
-                <a:uFillTx/>
-                <a:latin typeface="Arial"/>
-                <a:ea typeface="Arial"/>
-              </a:rPr>
-              <a:t>10 </a:t>
+              <a:t>GROUP NO 10 </a:t>
             </a:r>
             <a:endParaRPr lang="en-GB" sz="1400" b="0" u="none" strike="noStrike">
               <a:solidFill>
@@ -3421,7 +3200,7 @@
         </p:nvGraphicFramePr>
         <p:xfrm>
           <a:off x="1625400" y="3087720"/>
-          <a:ext cx="4799520" cy="1695240"/>
+          <a:ext cx="4799520" cy="1733400"/>
         </p:xfrm>
         <a:graphic>
           <a:graphicData uri="http://schemas.openxmlformats.org/drawingml/2006/table">
@@ -3439,6 +3218,11 @@
                       <a:noAutofit/>
                     </a:bodyPr>
                     <a:p>
+                      <a:pPr>
+                        <a:lnSpc>
+                          <a:spcPct val="100000"/>
+                        </a:lnSpc>
+                      </a:pPr>
                       <a:r>
                         <a:rPr lang="en-GB" sz="1800" b="0" u="none" strike="noStrike">
                           <a:solidFill>
@@ -3459,22 +3243,11 @@
                           <a:uFillTx/>
                           <a:latin typeface="Arial"/>
                         </a:rPr>
-                        <a:t>NAM</a:t>
-                      </a:r>
-                      <a:r>
-                        <a:rPr lang="en-GB" sz="1300" b="0" u="none" strike="noStrike">
-                          <a:solidFill>
-                            <a:srgbClr val="EEEEEE"/>
-                          </a:solidFill>
-                          <a:effectLst/>
-                          <a:uFillTx/>
-                          <a:latin typeface="Arial"/>
-                        </a:rPr>
-                        <a:t>ES</a:t>
+                        <a:t>NAMES</a:t>
                       </a:r>
                       <a:endParaRPr lang="en-GB" sz="1300" b="0" u="none" strike="noStrike">
                         <a:solidFill>
-                          <a:srgbClr val="EEEEEE"/>
+                          <a:srgbClr val="FFFFFF"/>
                         </a:solidFill>
                         <a:effectLst/>
                         <a:uFillTx/>
@@ -3516,6 +3289,11 @@
                       <a:noAutofit/>
                     </a:bodyPr>
                     <a:p>
+                      <a:pPr>
+                        <a:lnSpc>
+                          <a:spcPct val="100000"/>
+                        </a:lnSpc>
+                      </a:pPr>
                       <a:r>
                         <a:rPr lang="en-GB" sz="1300" b="0" u="none" strike="noStrike">
                           <a:solidFill>
@@ -3525,22 +3303,11 @@
                           <a:uFillTx/>
                           <a:latin typeface="Arial"/>
                         </a:rPr>
-                        <a:t> REG </a:t>
-                      </a:r>
-                      <a:r>
-                        <a:rPr lang="en-GB" sz="1300" b="0" u="none" strike="noStrike">
-                          <a:solidFill>
-                            <a:srgbClr val="EEEEEE"/>
-                          </a:solidFill>
-                          <a:effectLst/>
-                          <a:uFillTx/>
-                          <a:latin typeface="Arial"/>
-                        </a:rPr>
-                        <a:t>NO</a:t>
+                        <a:t> REG NO</a:t>
                       </a:r>
                       <a:endParaRPr lang="en-GB" sz="1300" b="0" u="none" strike="noStrike">
                         <a:solidFill>
-                          <a:srgbClr val="EEEEEE"/>
+                          <a:srgbClr val="FFFFFF"/>
                         </a:solidFill>
                         <a:effectLst/>
                         <a:uFillTx/>
@@ -3582,6 +3349,11 @@
                       <a:noAutofit/>
                     </a:bodyPr>
                     <a:p>
+                      <a:pPr>
+                        <a:lnSpc>
+                          <a:spcPct val="100000"/>
+                        </a:lnSpc>
+                      </a:pPr>
                       <a:r>
                         <a:rPr lang="en-GB" sz="1300" b="0" u="none" strike="noStrike">
                           <a:solidFill>
@@ -3591,22 +3363,11 @@
                           <a:uFillTx/>
                           <a:latin typeface="Arial"/>
                         </a:rPr>
-                        <a:t>COU</a:t>
-                      </a:r>
-                      <a:r>
-                        <a:rPr lang="en-GB" sz="1300" b="0" u="none" strike="noStrike">
-                          <a:solidFill>
-                            <a:srgbClr val="EEEEEE"/>
-                          </a:solidFill>
-                          <a:effectLst/>
-                          <a:uFillTx/>
-                          <a:latin typeface="Arial"/>
-                        </a:rPr>
-                        <a:t>RSE</a:t>
+                        <a:t>COURSE</a:t>
                       </a:r>
                       <a:endParaRPr lang="en-GB" sz="1300" b="0" u="none" strike="noStrike">
                         <a:solidFill>
-                          <a:srgbClr val="EEEEEE"/>
+                          <a:srgbClr val="FFFFFF"/>
                         </a:solidFill>
                         <a:effectLst/>
                         <a:uFillTx/>
@@ -3650,6 +3411,11 @@
                       <a:noAutofit/>
                     </a:bodyPr>
                     <a:p>
+                      <a:pPr>
+                        <a:lnSpc>
+                          <a:spcPct val="100000"/>
+                        </a:lnSpc>
+                      </a:pPr>
                       <a:r>
                         <a:rPr lang="en-GB" sz="1200" b="0" u="none" strike="noStrike">
                           <a:solidFill>
@@ -3659,55 +3425,11 @@
                           <a:uFillTx/>
                           <a:latin typeface="Arial"/>
                         </a:rPr>
-                        <a:t>NISA</a:t>
-                      </a:r>
-                      <a:r>
-                        <a:rPr lang="en-GB" sz="1200" b="0" u="none" strike="noStrike">
-                          <a:solidFill>
-                            <a:srgbClr val="EEEEEE"/>
-                          </a:solidFill>
-                          <a:effectLst/>
-                          <a:uFillTx/>
-                          <a:latin typeface="Arial"/>
-                        </a:rPr>
-                        <a:t>GUR</a:t>
-                      </a:r>
-                      <a:r>
-                        <a:rPr lang="en-GB" sz="1200" b="0" u="none" strike="noStrike">
-                          <a:solidFill>
-                            <a:srgbClr val="EEEEEE"/>
-                          </a:solidFill>
-                          <a:effectLst/>
-                          <a:uFillTx/>
-                          <a:latin typeface="Arial"/>
-                        </a:rPr>
-                        <a:t>WE S </a:t>
-                      </a:r>
-                      <a:r>
-                        <a:rPr lang="en-GB" sz="1200" b="0" u="none" strike="noStrike">
-                          <a:solidFill>
-                            <a:srgbClr val="EEEEEE"/>
-                          </a:solidFill>
-                          <a:effectLst/>
-                          <a:uFillTx/>
-                          <a:latin typeface="Arial"/>
-                        </a:rPr>
-                        <a:t>AGOS</a:t>
-                      </a:r>
-                      <a:r>
-                        <a:rPr lang="en-GB" sz="1200" b="0" u="none" strike="noStrike">
-                          <a:solidFill>
-                            <a:srgbClr val="EEEEEE"/>
-                          </a:solidFill>
-                          <a:effectLst/>
-                          <a:uFillTx/>
-                          <a:latin typeface="Arial"/>
-                        </a:rPr>
-                        <a:t>TINO</a:t>
+                        <a:t>NISAGURWE S AGOSTINO</a:t>
                       </a:r>
                       <a:endParaRPr lang="en-GB" sz="1200" b="0" u="none" strike="noStrike">
                         <a:solidFill>
-                          <a:srgbClr val="EEEEEE"/>
+                          <a:srgbClr val="FFFFFF"/>
                         </a:solidFill>
                         <a:effectLst/>
                         <a:uFillTx/>
@@ -3749,6 +3471,11 @@
                       <a:noAutofit/>
                     </a:bodyPr>
                     <a:p>
+                      <a:pPr>
+                        <a:lnSpc>
+                          <a:spcPct val="100000"/>
+                        </a:lnSpc>
+                      </a:pPr>
                       <a:r>
                         <a:rPr lang="en-GB" sz="1200" b="0" u="none" strike="noStrike">
                           <a:solidFill>
@@ -3758,33 +3485,11 @@
                           <a:uFillTx/>
                           <a:latin typeface="Arial"/>
                         </a:rPr>
-                        <a:t>T23-</a:t>
-                      </a:r>
-                      <a:r>
-                        <a:rPr lang="en-GB" sz="1200" b="0" u="none" strike="noStrike">
-                          <a:solidFill>
-                            <a:srgbClr val="EEEEEE"/>
-                          </a:solidFill>
-                          <a:effectLst/>
-                          <a:uFillTx/>
-                          <a:latin typeface="Arial"/>
-                        </a:rPr>
-                        <a:t>03-</a:t>
-                      </a:r>
-                      <a:r>
-                        <a:rPr lang="en-GB" sz="1200" b="0" u="none" strike="noStrike">
-                          <a:solidFill>
-                            <a:srgbClr val="EEEEEE"/>
-                          </a:solidFill>
-                          <a:effectLst/>
-                          <a:uFillTx/>
-                          <a:latin typeface="Arial"/>
-                        </a:rPr>
-                        <a:t>14465</a:t>
+                        <a:t>T23-03-14465</a:t>
                       </a:r>
                       <a:endParaRPr lang="en-GB" sz="1200" b="0" u="none" strike="noStrike">
                         <a:solidFill>
-                          <a:srgbClr val="EEEEEE"/>
+                          <a:srgbClr val="FFFFFF"/>
                         </a:solidFill>
                         <a:effectLst/>
                         <a:uFillTx/>
@@ -3826,440 +3531,11 @@
                       <a:noAutofit/>
                     </a:bodyPr>
                     <a:p>
-                      <a:r>
-                        <a:rPr lang="en-GB" sz="1800" b="0" u="none" strike="noStrike">
-                          <a:solidFill>
-                            <a:srgbClr val="EEEEEE"/>
-                          </a:solidFill>
-                          <a:effectLst/>
-                          <a:uFillTx/>
-                          <a:latin typeface="Arial"/>
-                        </a:rPr>
-                        <a:t>   </a:t>
-                      </a:r>
-                      <a:r>
-                        <a:rPr lang="en-GB" sz="1200" b="0" u="none" strike="noStrike">
-                          <a:solidFill>
-                            <a:srgbClr val="EEEEEE"/>
-                          </a:solidFill>
-                          <a:effectLst/>
-                          <a:uFillTx/>
-                          <a:latin typeface="Arial"/>
-                        </a:rPr>
-                        <a:t>BSc.C</a:t>
-                      </a:r>
-                      <a:r>
-                        <a:rPr lang="en-GB" sz="1200" b="0" u="none" strike="noStrike">
-                          <a:solidFill>
-                            <a:srgbClr val="EEEEEE"/>
-                          </a:solidFill>
-                          <a:effectLst/>
-                          <a:uFillTx/>
-                          <a:latin typeface="Arial"/>
-                        </a:rPr>
-                        <a:t>E</a:t>
-                      </a:r>
-                      <a:endParaRPr lang="en-GB" sz="1200" b="0" u="none" strike="noStrike">
-                        <a:solidFill>
-                          <a:srgbClr val="EEEEEE"/>
-                        </a:solidFill>
-                        <a:effectLst/>
-                        <a:uFillTx/>
-                        <a:latin typeface="Arial"/>
-                      </a:endParaRPr>
-                    </a:p>
-                  </a:txBody>
-                  <a:tcPr anchor="t" marL="36000" marR="36000" marT="36000" marB="36000">
-                    <a:lnL w="7200">
-                      <a:solidFill>
-                        <a:srgbClr val="000000"/>
-                      </a:solidFill>
-                      <a:prstDash val="solid"/>
-                    </a:lnL>
-                    <a:lnR w="7200">
-                      <a:solidFill>
-                        <a:srgbClr val="000000"/>
-                      </a:solidFill>
-                      <a:prstDash val="solid"/>
-                    </a:lnR>
-                    <a:lnT w="7200">
-                      <a:solidFill>
-                        <a:srgbClr val="000000"/>
-                      </a:solidFill>
-                      <a:prstDash val="solid"/>
-                    </a:lnT>
-                    <a:lnB w="7200">
-                      <a:solidFill>
-                        <a:srgbClr val="000000"/>
-                      </a:solidFill>
-                      <a:prstDash val="solid"/>
-                    </a:lnB>
-                    <a:noFill/>
-                  </a:tcPr>
-                </a:tc>
-              </a:tr>
-              <a:tr h="346320">
-                <a:tc>
-                  <a:txBody>
-                    <a:bodyPr lIns="36000" tIns="36000" rIns="36000" bIns="36000" anchor="t">
-                      <a:noAutofit/>
-                    </a:bodyPr>
-                    <a:p>
-                      <a:r>
-                        <a:rPr lang="en-GB" sz="1200" b="0" u="none" strike="noStrike">
-                          <a:solidFill>
-                            <a:srgbClr val="EEEEEE"/>
-                          </a:solidFill>
-                          <a:effectLst/>
-                          <a:uFillTx/>
-                          <a:latin typeface="Arial"/>
-                        </a:rPr>
-                        <a:t>DAVID </a:t>
-                      </a:r>
-                      <a:r>
-                        <a:rPr lang="en-GB" sz="1200" b="0" u="none" strike="noStrike">
-                          <a:solidFill>
-                            <a:srgbClr val="EEEEEE"/>
-                          </a:solidFill>
-                          <a:effectLst/>
-                          <a:uFillTx/>
-                          <a:latin typeface="Arial"/>
-                        </a:rPr>
-                        <a:t>DANI</a:t>
-                      </a:r>
-                      <a:r>
-                        <a:rPr lang="en-GB" sz="1200" b="0" u="none" strike="noStrike">
-                          <a:solidFill>
-                            <a:srgbClr val="EEEEEE"/>
-                          </a:solidFill>
-                          <a:effectLst/>
-                          <a:uFillTx/>
-                          <a:latin typeface="Arial"/>
-                        </a:rPr>
-                        <a:t>EL </a:t>
-                      </a:r>
-                      <a:r>
-                        <a:rPr lang="en-GB" sz="1200" b="0" u="none" strike="noStrike">
-                          <a:solidFill>
-                            <a:srgbClr val="EEEEEE"/>
-                          </a:solidFill>
-                          <a:effectLst/>
-                          <a:uFillTx/>
-                          <a:latin typeface="Arial"/>
-                        </a:rPr>
-                        <a:t>DAVID</a:t>
-                      </a:r>
-                      <a:endParaRPr lang="en-GB" sz="1200" b="0" u="none" strike="noStrike">
-                        <a:solidFill>
-                          <a:srgbClr val="EEEEEE"/>
-                        </a:solidFill>
-                        <a:effectLst/>
-                        <a:uFillTx/>
-                        <a:latin typeface="Arial"/>
-                      </a:endParaRPr>
-                    </a:p>
-                  </a:txBody>
-                  <a:tcPr anchor="t" marL="36000" marR="36000" marT="36000" marB="36000">
-                    <a:lnL w="7200">
-                      <a:solidFill>
-                        <a:srgbClr val="000000"/>
-                      </a:solidFill>
-                      <a:prstDash val="solid"/>
-                    </a:lnL>
-                    <a:lnR w="7200">
-                      <a:solidFill>
-                        <a:srgbClr val="000000"/>
-                      </a:solidFill>
-                      <a:prstDash val="solid"/>
-                    </a:lnR>
-                    <a:lnT w="7200">
-                      <a:solidFill>
-                        <a:srgbClr val="000000"/>
-                      </a:solidFill>
-                      <a:prstDash val="solid"/>
-                    </a:lnT>
-                    <a:lnB w="7200">
-                      <a:solidFill>
-                        <a:srgbClr val="000000"/>
-                      </a:solidFill>
-                      <a:prstDash val="solid"/>
-                    </a:lnB>
-                    <a:noFill/>
-                  </a:tcPr>
-                </a:tc>
-                <a:tc>
-                  <a:txBody>
-                    <a:bodyPr lIns="36000" tIns="36000" rIns="36000" bIns="36000" anchor="t">
-                      <a:noAutofit/>
-                    </a:bodyPr>
-                    <a:p>
-                      <a:r>
-                        <a:rPr lang="en-GB" sz="1200" b="0" u="none" strike="noStrike">
-                          <a:solidFill>
-                            <a:srgbClr val="EEEEEE"/>
-                          </a:solidFill>
-                          <a:effectLst/>
-                          <a:uFillTx/>
-                          <a:latin typeface="Arial"/>
-                        </a:rPr>
-                        <a:t>T23-</a:t>
-                      </a:r>
-                      <a:r>
-                        <a:rPr lang="en-GB" sz="1200" b="0" u="none" strike="noStrike">
-                          <a:solidFill>
-                            <a:srgbClr val="EEEEEE"/>
-                          </a:solidFill>
-                          <a:effectLst/>
-                          <a:uFillTx/>
-                          <a:latin typeface="Arial"/>
-                        </a:rPr>
-                        <a:t>03-</a:t>
-                      </a:r>
-                      <a:r>
-                        <a:rPr lang="en-GB" sz="1200" b="0" u="none" strike="noStrike">
-                          <a:solidFill>
-                            <a:srgbClr val="EEEEEE"/>
-                          </a:solidFill>
-                          <a:effectLst/>
-                          <a:uFillTx/>
-                          <a:latin typeface="Arial"/>
-                        </a:rPr>
-                        <a:t>15326</a:t>
-                      </a:r>
-                      <a:endParaRPr lang="en-GB" sz="1200" b="0" u="none" strike="noStrike">
-                        <a:solidFill>
-                          <a:srgbClr val="EEEEEE"/>
-                        </a:solidFill>
-                        <a:effectLst/>
-                        <a:uFillTx/>
-                        <a:latin typeface="Arial"/>
-                      </a:endParaRPr>
-                    </a:p>
-                  </a:txBody>
-                  <a:tcPr anchor="t" marL="36000" marR="36000" marT="36000" marB="36000">
-                    <a:lnL w="7200">
-                      <a:solidFill>
-                        <a:srgbClr val="000000"/>
-                      </a:solidFill>
-                      <a:prstDash val="solid"/>
-                    </a:lnL>
-                    <a:lnR w="7200">
-                      <a:solidFill>
-                        <a:srgbClr val="000000"/>
-                      </a:solidFill>
-                      <a:prstDash val="solid"/>
-                    </a:lnR>
-                    <a:lnT w="7200">
-                      <a:solidFill>
-                        <a:srgbClr val="000000"/>
-                      </a:solidFill>
-                      <a:prstDash val="solid"/>
-                    </a:lnT>
-                    <a:lnB w="7200">
-                      <a:solidFill>
-                        <a:srgbClr val="000000"/>
-                      </a:solidFill>
-                      <a:prstDash val="solid"/>
-                    </a:lnB>
-                    <a:noFill/>
-                  </a:tcPr>
-                </a:tc>
-                <a:tc>
-                  <a:txBody>
-                    <a:bodyPr lIns="36000" tIns="36000" rIns="36000" bIns="36000" anchor="t">
-                      <a:noAutofit/>
-                    </a:bodyPr>
-                    <a:p>
-                      <a:r>
-                        <a:rPr lang="en-GB" sz="1800" b="0" u="none" strike="noStrike">
-                          <a:solidFill>
-                            <a:srgbClr val="EEEEEE"/>
-                          </a:solidFill>
-                          <a:effectLst/>
-                          <a:uFillTx/>
-                          <a:latin typeface="Arial"/>
-                          <a:ea typeface="Noto Sans"/>
-                        </a:rPr>
-                        <a:t>   </a:t>
-                      </a:r>
-                      <a:r>
-                        <a:rPr lang="en-GB" sz="1200" b="0" u="none" strike="noStrike">
-                          <a:solidFill>
-                            <a:srgbClr val="EEEEEE"/>
-                          </a:solidFill>
-                          <a:effectLst/>
-                          <a:uFillTx/>
-                          <a:latin typeface="Arial"/>
-                        </a:rPr>
-                        <a:t>BSc.C</a:t>
-                      </a:r>
-                      <a:r>
-                        <a:rPr lang="en-GB" sz="1200" b="0" u="none" strike="noStrike">
-                          <a:solidFill>
-                            <a:srgbClr val="EEEEEE"/>
-                          </a:solidFill>
-                          <a:effectLst/>
-                          <a:uFillTx/>
-                          <a:latin typeface="Arial"/>
-                        </a:rPr>
-                        <a:t>E</a:t>
-                      </a:r>
-                      <a:endParaRPr lang="en-GB" sz="1200" b="0" u="none" strike="noStrike">
-                        <a:solidFill>
-                          <a:srgbClr val="EEEEEE"/>
-                        </a:solidFill>
-                        <a:effectLst/>
-                        <a:uFillTx/>
-                        <a:latin typeface="Arial"/>
-                      </a:endParaRPr>
-                    </a:p>
-                  </a:txBody>
-                  <a:tcPr anchor="t" marL="36000" marR="36000" marT="36000" marB="36000">
-                    <a:lnL w="7200">
-                      <a:solidFill>
-                        <a:srgbClr val="000000"/>
-                      </a:solidFill>
-                      <a:prstDash val="solid"/>
-                    </a:lnL>
-                    <a:lnR w="7200">
-                      <a:solidFill>
-                        <a:srgbClr val="000000"/>
-                      </a:solidFill>
-                      <a:prstDash val="solid"/>
-                    </a:lnR>
-                    <a:lnT w="7200">
-                      <a:solidFill>
-                        <a:srgbClr val="000000"/>
-                      </a:solidFill>
-                      <a:prstDash val="solid"/>
-                    </a:lnT>
-                    <a:lnB w="7200">
-                      <a:solidFill>
-                        <a:srgbClr val="000000"/>
-                      </a:solidFill>
-                      <a:prstDash val="solid"/>
-                    </a:lnB>
-                    <a:noFill/>
-                  </a:tcPr>
-                </a:tc>
-              </a:tr>
-              <a:tr h="346320">
-                <a:tc>
-                  <a:txBody>
-                    <a:bodyPr lIns="36000" tIns="36000" rIns="36000" bIns="36000" anchor="t">
-                      <a:noAutofit/>
-                    </a:bodyPr>
-                    <a:p>
-                      <a:r>
-                        <a:rPr lang="en-GB" sz="1200" b="0" u="none" strike="noStrike">
-                          <a:solidFill>
-                            <a:srgbClr val="EEEEEE"/>
-                          </a:solidFill>
-                          <a:effectLst/>
-                          <a:uFillTx/>
-                          <a:latin typeface="Arial"/>
-                        </a:rPr>
-                        <a:t>DENNIS MARIWA </a:t>
-                      </a:r>
-                      <a:endParaRPr lang="en-GB" sz="1200" b="0" u="none" strike="noStrike">
-                        <a:solidFill>
-                          <a:srgbClr val="EEEEEE"/>
-                        </a:solidFill>
-                        <a:effectLst/>
-                        <a:uFillTx/>
-                        <a:latin typeface="Arial"/>
-                      </a:endParaRPr>
-                    </a:p>
-                  </a:txBody>
-                  <a:tcPr anchor="t" marL="36000" marR="36000" marT="36000" marB="36000">
-                    <a:lnL w="7200">
-                      <a:solidFill>
-                        <a:srgbClr val="000000"/>
-                      </a:solidFill>
-                      <a:prstDash val="solid"/>
-                    </a:lnL>
-                    <a:lnR w="7200">
-                      <a:solidFill>
-                        <a:srgbClr val="000000"/>
-                      </a:solidFill>
-                      <a:prstDash val="solid"/>
-                    </a:lnR>
-                    <a:lnT w="7200">
-                      <a:solidFill>
-                        <a:srgbClr val="000000"/>
-                      </a:solidFill>
-                      <a:prstDash val="solid"/>
-                    </a:lnT>
-                    <a:lnB w="7200">
-                      <a:solidFill>
-                        <a:srgbClr val="000000"/>
-                      </a:solidFill>
-                      <a:prstDash val="solid"/>
-                    </a:lnB>
-                    <a:noFill/>
-                  </a:tcPr>
-                </a:tc>
-                <a:tc>
-                  <a:txBody>
-                    <a:bodyPr lIns="36000" tIns="36000" rIns="36000" bIns="36000" anchor="t">
-                      <a:noAutofit/>
-                    </a:bodyPr>
-                    <a:p>
-                      <a:r>
-                        <a:rPr lang="en-GB" sz="1200" b="0" u="none" strike="noStrike">
-                          <a:solidFill>
-                            <a:srgbClr val="EEEEEE"/>
-                          </a:solidFill>
-                          <a:effectLst/>
-                          <a:uFillTx/>
-                          <a:latin typeface="Arial"/>
-                        </a:rPr>
-                        <a:t>T23-03-19910</a:t>
-                      </a:r>
-                      <a:endParaRPr lang="en-GB" sz="1200" b="0" u="none" strike="noStrike">
-                        <a:solidFill>
-                          <a:srgbClr val="EEEEEE"/>
-                        </a:solidFill>
-                        <a:effectLst/>
-                        <a:uFillTx/>
-                        <a:latin typeface="Arial"/>
-                      </a:endParaRPr>
-                    </a:p>
-                  </a:txBody>
-                  <a:tcPr anchor="t" marL="36000" marR="36000" marT="36000" marB="36000">
-                    <a:lnL w="7200">
-                      <a:solidFill>
-                        <a:srgbClr val="000000"/>
-                      </a:solidFill>
-                      <a:prstDash val="solid"/>
-                    </a:lnL>
-                    <a:lnR w="7200">
-                      <a:solidFill>
-                        <a:srgbClr val="000000"/>
-                      </a:solidFill>
-                      <a:prstDash val="solid"/>
-                    </a:lnR>
-                    <a:lnT w="7200">
-                      <a:solidFill>
-                        <a:srgbClr val="000000"/>
-                      </a:solidFill>
-                      <a:prstDash val="solid"/>
-                    </a:lnT>
-                    <a:lnB w="7200">
-                      <a:solidFill>
-                        <a:srgbClr val="000000"/>
-                      </a:solidFill>
-                      <a:prstDash val="solid"/>
-                    </a:lnB>
-                    <a:noFill/>
-                  </a:tcPr>
-                </a:tc>
-                <a:tc>
-                  <a:txBody>
-                    <a:bodyPr lIns="36000" tIns="36000" rIns="36000" bIns="36000" anchor="t">
-                      <a:noAutofit/>
-                    </a:bodyPr>
-                    <a:p>
+                      <a:pPr>
+                        <a:lnSpc>
+                          <a:spcPct val="100000"/>
+                        </a:lnSpc>
+                      </a:pPr>
                       <a:r>
                         <a:rPr lang="en-GB" sz="1800" b="0" u="none" strike="noStrike">
                           <a:solidFill>
@@ -4284,7 +3560,7 @@
                       </a:r>
                       <a:endParaRPr lang="en-GB" sz="1200" b="0" u="none" strike="noStrike">
                         <a:solidFill>
-                          <a:srgbClr val="EEEEEE"/>
+                          <a:srgbClr val="FFFFFF"/>
                         </a:solidFill>
                         <a:effectLst/>
                         <a:uFillTx/>
@@ -4321,13 +3597,18 @@
                   </a:tcPr>
                 </a:tc>
               </a:tr>
-              <a:tr h="216000">
+              <a:tr h="346320">
                 <a:tc>
                   <a:txBody>
                     <a:bodyPr lIns="36000" tIns="36000" rIns="36000" bIns="36000" anchor="t">
                       <a:noAutofit/>
                     </a:bodyPr>
                     <a:p>
+                      <a:pPr>
+                        <a:lnSpc>
+                          <a:spcPct val="100000"/>
+                        </a:lnSpc>
+                      </a:pPr>
                       <a:r>
                         <a:rPr lang="en-GB" sz="1200" b="0" u="none" strike="noStrike">
                           <a:solidFill>
@@ -4337,11 +3618,11 @@
                           <a:uFillTx/>
                           <a:latin typeface="Arial"/>
                         </a:rPr>
-                        <a:t>EMMANUEL N FULUGE</a:t>
+                        <a:t>DAVID DANIEL DAVID</a:t>
                       </a:r>
                       <a:endParaRPr lang="en-GB" sz="1200" b="0" u="none" strike="noStrike">
                         <a:solidFill>
-                          <a:srgbClr val="EEEEEE"/>
+                          <a:srgbClr val="FFFFFF"/>
                         </a:solidFill>
                         <a:effectLst/>
                         <a:uFillTx/>
@@ -4383,6 +3664,11 @@
                       <a:noAutofit/>
                     </a:bodyPr>
                     <a:p>
+                      <a:pPr>
+                        <a:lnSpc>
+                          <a:spcPct val="100000"/>
+                        </a:lnSpc>
+                      </a:pPr>
                       <a:r>
                         <a:rPr lang="en-GB" sz="1200" b="0" u="none" strike="noStrike">
                           <a:solidFill>
@@ -4392,11 +3678,11 @@
                           <a:uFillTx/>
                           <a:latin typeface="Arial"/>
                         </a:rPr>
-                        <a:t>T23-03-15286</a:t>
+                        <a:t>T23-03-15326</a:t>
                       </a:r>
                       <a:endParaRPr lang="en-GB" sz="1200" b="0" u="none" strike="noStrike">
                         <a:solidFill>
-                          <a:srgbClr val="EEEEEE"/>
+                          <a:srgbClr val="FFFFFF"/>
                         </a:solidFill>
                         <a:effectLst/>
                         <a:uFillTx/>
@@ -4438,6 +3724,206 @@
                       <a:noAutofit/>
                     </a:bodyPr>
                     <a:p>
+                      <a:pPr>
+                        <a:lnSpc>
+                          <a:spcPct val="100000"/>
+                        </a:lnSpc>
+                      </a:pPr>
+                      <a:r>
+                        <a:rPr lang="en-GB" sz="1800" b="0" u="none" strike="noStrike">
+                          <a:solidFill>
+                            <a:srgbClr val="EEEEEE"/>
+                          </a:solidFill>
+                          <a:effectLst/>
+                          <a:uFillTx/>
+                          <a:latin typeface="Arial"/>
+                          <a:ea typeface="Noto Sans"/>
+                        </a:rPr>
+                        <a:t>   </a:t>
+                      </a:r>
+                      <a:r>
+                        <a:rPr lang="en-GB" sz="1200" b="0" u="none" strike="noStrike">
+                          <a:solidFill>
+                            <a:srgbClr val="EEEEEE"/>
+                          </a:solidFill>
+                          <a:effectLst/>
+                          <a:uFillTx/>
+                          <a:latin typeface="Arial"/>
+                          <a:ea typeface="Noto Sans"/>
+                        </a:rPr>
+                        <a:t>BSc.CE</a:t>
+                      </a:r>
+                      <a:endParaRPr lang="en-GB" sz="1200" b="0" u="none" strike="noStrike">
+                        <a:solidFill>
+                          <a:srgbClr val="FFFFFF"/>
+                        </a:solidFill>
+                        <a:effectLst/>
+                        <a:uFillTx/>
+                        <a:latin typeface="Arial"/>
+                      </a:endParaRPr>
+                    </a:p>
+                  </a:txBody>
+                  <a:tcPr anchor="t" marL="36000" marR="36000" marT="36000" marB="36000">
+                    <a:lnL w="7200">
+                      <a:solidFill>
+                        <a:srgbClr val="000000"/>
+                      </a:solidFill>
+                      <a:prstDash val="solid"/>
+                    </a:lnL>
+                    <a:lnR w="7200">
+                      <a:solidFill>
+                        <a:srgbClr val="000000"/>
+                      </a:solidFill>
+                      <a:prstDash val="solid"/>
+                    </a:lnR>
+                    <a:lnT w="7200">
+                      <a:solidFill>
+                        <a:srgbClr val="000000"/>
+                      </a:solidFill>
+                      <a:prstDash val="solid"/>
+                    </a:lnT>
+                    <a:lnB w="7200">
+                      <a:solidFill>
+                        <a:srgbClr val="000000"/>
+                      </a:solidFill>
+                      <a:prstDash val="solid"/>
+                    </a:lnB>
+                    <a:noFill/>
+                  </a:tcPr>
+                </a:tc>
+              </a:tr>
+              <a:tr h="346320">
+                <a:tc>
+                  <a:txBody>
+                    <a:bodyPr lIns="36000" tIns="36000" rIns="36000" bIns="36000" anchor="t">
+                      <a:noAutofit/>
+                    </a:bodyPr>
+                    <a:p>
+                      <a:pPr>
+                        <a:lnSpc>
+                          <a:spcPct val="100000"/>
+                        </a:lnSpc>
+                      </a:pPr>
+                      <a:r>
+                        <a:rPr lang="en-GB" sz="1200" b="0" u="none" strike="noStrike">
+                          <a:solidFill>
+                            <a:srgbClr val="EEEEEE"/>
+                          </a:solidFill>
+                          <a:effectLst/>
+                          <a:uFillTx/>
+                          <a:latin typeface="Arial"/>
+                        </a:rPr>
+                        <a:t>DENNIS MARIWA </a:t>
+                      </a:r>
+                      <a:endParaRPr lang="en-GB" sz="1200" b="0" u="none" strike="noStrike">
+                        <a:solidFill>
+                          <a:srgbClr val="FFFFFF"/>
+                        </a:solidFill>
+                        <a:effectLst/>
+                        <a:uFillTx/>
+                        <a:latin typeface="Arial"/>
+                      </a:endParaRPr>
+                    </a:p>
+                  </a:txBody>
+                  <a:tcPr anchor="t" marL="36000" marR="36000" marT="36000" marB="36000">
+                    <a:lnL w="7200">
+                      <a:solidFill>
+                        <a:srgbClr val="000000"/>
+                      </a:solidFill>
+                      <a:prstDash val="solid"/>
+                    </a:lnL>
+                    <a:lnR w="7200">
+                      <a:solidFill>
+                        <a:srgbClr val="000000"/>
+                      </a:solidFill>
+                      <a:prstDash val="solid"/>
+                    </a:lnR>
+                    <a:lnT w="7200">
+                      <a:solidFill>
+                        <a:srgbClr val="000000"/>
+                      </a:solidFill>
+                      <a:prstDash val="solid"/>
+                    </a:lnT>
+                    <a:lnB w="7200">
+                      <a:solidFill>
+                        <a:srgbClr val="000000"/>
+                      </a:solidFill>
+                      <a:prstDash val="solid"/>
+                    </a:lnB>
+                    <a:noFill/>
+                  </a:tcPr>
+                </a:tc>
+                <a:tc>
+                  <a:txBody>
+                    <a:bodyPr lIns="36000" tIns="36000" rIns="36000" bIns="36000" anchor="t">
+                      <a:noAutofit/>
+                    </a:bodyPr>
+                    <a:p>
+                      <a:pPr>
+                        <a:lnSpc>
+                          <a:spcPct val="100000"/>
+                        </a:lnSpc>
+                      </a:pPr>
+                      <a:r>
+                        <a:rPr lang="en-GB" sz="1200" b="0" u="none" strike="noStrike">
+                          <a:solidFill>
+                            <a:srgbClr val="EEEEEE"/>
+                          </a:solidFill>
+                          <a:effectLst/>
+                          <a:uFillTx/>
+                          <a:latin typeface="Arial"/>
+                        </a:rPr>
+                        <a:t>T23-03-19910</a:t>
+                      </a:r>
+                      <a:endParaRPr lang="en-GB" sz="1200" b="0" u="none" strike="noStrike">
+                        <a:solidFill>
+                          <a:srgbClr val="FFFFFF"/>
+                        </a:solidFill>
+                        <a:effectLst/>
+                        <a:uFillTx/>
+                        <a:latin typeface="Arial"/>
+                      </a:endParaRPr>
+                    </a:p>
+                  </a:txBody>
+                  <a:tcPr anchor="t" marL="36000" marR="36000" marT="36000" marB="36000">
+                    <a:lnL w="7200">
+                      <a:solidFill>
+                        <a:srgbClr val="000000"/>
+                      </a:solidFill>
+                      <a:prstDash val="solid"/>
+                    </a:lnL>
+                    <a:lnR w="7200">
+                      <a:solidFill>
+                        <a:srgbClr val="000000"/>
+                      </a:solidFill>
+                      <a:prstDash val="solid"/>
+                    </a:lnR>
+                    <a:lnT w="7200">
+                      <a:solidFill>
+                        <a:srgbClr val="000000"/>
+                      </a:solidFill>
+                      <a:prstDash val="solid"/>
+                    </a:lnT>
+                    <a:lnB w="7200">
+                      <a:solidFill>
+                        <a:srgbClr val="000000"/>
+                      </a:solidFill>
+                      <a:prstDash val="solid"/>
+                    </a:lnB>
+                    <a:noFill/>
+                  </a:tcPr>
+                </a:tc>
+                <a:tc>
+                  <a:txBody>
+                    <a:bodyPr lIns="36000" tIns="36000" rIns="36000" bIns="36000" anchor="t">
+                      <a:noAutofit/>
+                    </a:bodyPr>
+                    <a:p>
+                      <a:pPr>
+                        <a:lnSpc>
+                          <a:spcPct val="100000"/>
+                        </a:lnSpc>
+                      </a:pPr>
                       <a:r>
                         <a:rPr lang="en-GB" sz="1800" b="0" u="none" strike="noStrike">
                           <a:solidFill>
@@ -4462,7 +3948,200 @@
                       </a:r>
                       <a:endParaRPr lang="en-GB" sz="1200" b="0" u="none" strike="noStrike">
                         <a:solidFill>
-                          <a:srgbClr val="EEEEEE"/>
+                          <a:srgbClr val="FFFFFF"/>
+                        </a:solidFill>
+                        <a:effectLst/>
+                        <a:uFillTx/>
+                        <a:latin typeface="Arial"/>
+                      </a:endParaRPr>
+                    </a:p>
+                  </a:txBody>
+                  <a:tcPr anchor="t" marL="36000" marR="36000" marT="36000" marB="36000">
+                    <a:lnL w="7200">
+                      <a:solidFill>
+                        <a:srgbClr val="000000"/>
+                      </a:solidFill>
+                      <a:prstDash val="solid"/>
+                    </a:lnL>
+                    <a:lnR w="7200">
+                      <a:solidFill>
+                        <a:srgbClr val="000000"/>
+                      </a:solidFill>
+                      <a:prstDash val="solid"/>
+                    </a:lnR>
+                    <a:lnT w="7200">
+                      <a:solidFill>
+                        <a:srgbClr val="000000"/>
+                      </a:solidFill>
+                      <a:prstDash val="solid"/>
+                    </a:lnT>
+                    <a:lnB w="7200">
+                      <a:solidFill>
+                        <a:srgbClr val="000000"/>
+                      </a:solidFill>
+                      <a:prstDash val="solid"/>
+                    </a:lnB>
+                    <a:noFill/>
+                  </a:tcPr>
+                </a:tc>
+              </a:tr>
+              <a:tr h="216000">
+                <a:tc>
+                  <a:txBody>
+                    <a:bodyPr lIns="36000" tIns="36000" rIns="36000" bIns="36000" anchor="t">
+                      <a:noAutofit/>
+                    </a:bodyPr>
+                    <a:p>
+                      <a:pPr>
+                        <a:lnSpc>
+                          <a:spcPct val="100000"/>
+                        </a:lnSpc>
+                      </a:pPr>
+                      <a:r>
+                        <a:rPr lang="en-GB" sz="1200" b="0" u="none" strike="noStrike">
+                          <a:solidFill>
+                            <a:srgbClr val="EEEEEE"/>
+                          </a:solidFill>
+                          <a:effectLst/>
+                          <a:uFillTx/>
+                          <a:latin typeface="Arial"/>
+                        </a:rPr>
+                        <a:t>EMMANUEL N FULUGE</a:t>
+                      </a:r>
+                      <a:endParaRPr lang="en-GB" sz="1200" b="0" u="none" strike="noStrike">
+                        <a:solidFill>
+                          <a:srgbClr val="FFFFFF"/>
+                        </a:solidFill>
+                        <a:effectLst/>
+                        <a:uFillTx/>
+                        <a:latin typeface="Arial"/>
+                      </a:endParaRPr>
+                    </a:p>
+                  </a:txBody>
+                  <a:tcPr anchor="t" marL="36000" marR="36000" marT="36000" marB="36000">
+                    <a:lnL w="7200">
+                      <a:solidFill>
+                        <a:srgbClr val="000000"/>
+                      </a:solidFill>
+                      <a:prstDash val="solid"/>
+                    </a:lnL>
+                    <a:lnR w="7200">
+                      <a:solidFill>
+                        <a:srgbClr val="000000"/>
+                      </a:solidFill>
+                      <a:prstDash val="solid"/>
+                    </a:lnR>
+                    <a:lnT w="7200">
+                      <a:solidFill>
+                        <a:srgbClr val="000000"/>
+                      </a:solidFill>
+                      <a:prstDash val="solid"/>
+                    </a:lnT>
+                    <a:lnB w="7200">
+                      <a:solidFill>
+                        <a:srgbClr val="000000"/>
+                      </a:solidFill>
+                      <a:prstDash val="solid"/>
+                    </a:lnB>
+                    <a:noFill/>
+                  </a:tcPr>
+                </a:tc>
+                <a:tc>
+                  <a:txBody>
+                    <a:bodyPr lIns="36000" tIns="36000" rIns="36000" bIns="36000" anchor="t">
+                      <a:noAutofit/>
+                    </a:bodyPr>
+                    <a:p>
+                      <a:pPr>
+                        <a:lnSpc>
+                          <a:spcPct val="100000"/>
+                        </a:lnSpc>
+                      </a:pPr>
+                      <a:r>
+                        <a:rPr lang="en-GB" sz="1200" b="0" u="none" strike="noStrike">
+                          <a:solidFill>
+                            <a:srgbClr val="EEEEEE"/>
+                          </a:solidFill>
+                          <a:effectLst/>
+                          <a:uFillTx/>
+                          <a:latin typeface="Arial"/>
+                        </a:rPr>
+                        <a:t>T23-03-15286</a:t>
+                      </a:r>
+                      <a:endParaRPr lang="en-GB" sz="1200" b="0" u="none" strike="noStrike">
+                        <a:solidFill>
+                          <a:srgbClr val="FFFFFF"/>
+                        </a:solidFill>
+                        <a:effectLst/>
+                        <a:uFillTx/>
+                        <a:latin typeface="Arial"/>
+                      </a:endParaRPr>
+                    </a:p>
+                  </a:txBody>
+                  <a:tcPr anchor="t" marL="36000" marR="36000" marT="36000" marB="36000">
+                    <a:lnL w="7200">
+                      <a:solidFill>
+                        <a:srgbClr val="000000"/>
+                      </a:solidFill>
+                      <a:prstDash val="solid"/>
+                    </a:lnL>
+                    <a:lnR w="7200">
+                      <a:solidFill>
+                        <a:srgbClr val="000000"/>
+                      </a:solidFill>
+                      <a:prstDash val="solid"/>
+                    </a:lnR>
+                    <a:lnT w="7200">
+                      <a:solidFill>
+                        <a:srgbClr val="000000"/>
+                      </a:solidFill>
+                      <a:prstDash val="solid"/>
+                    </a:lnT>
+                    <a:lnB w="7200">
+                      <a:solidFill>
+                        <a:srgbClr val="000000"/>
+                      </a:solidFill>
+                      <a:prstDash val="solid"/>
+                    </a:lnB>
+                    <a:noFill/>
+                  </a:tcPr>
+                </a:tc>
+                <a:tc>
+                  <a:txBody>
+                    <a:bodyPr lIns="36000" tIns="36000" rIns="36000" bIns="36000" anchor="t">
+                      <a:noAutofit/>
+                    </a:bodyPr>
+                    <a:p>
+                      <a:pPr>
+                        <a:lnSpc>
+                          <a:spcPct val="100000"/>
+                        </a:lnSpc>
+                      </a:pPr>
+                      <a:r>
+                        <a:rPr lang="en-GB" sz="1800" b="0" u="none" strike="noStrike">
+                          <a:solidFill>
+                            <a:srgbClr val="EEEEEE"/>
+                          </a:solidFill>
+                          <a:effectLst/>
+                          <a:uFillTx/>
+                          <a:latin typeface="Arial"/>
+                        </a:rPr>
+                        <a:t>   </a:t>
+                      </a:r>
+                      <a:r>
+                        <a:rPr lang="en-GB" sz="1200" b="0" u="none" strike="noStrike">
+                          <a:solidFill>
+                            <a:srgbClr val="EEEEEE"/>
+                          </a:solidFill>
+                          <a:effectLst/>
+                          <a:uFillTx/>
+                          <a:latin typeface="Arial"/>
+                        </a:rPr>
+                        <a:t>BSc.CE</a:t>
+                      </a:r>
+                      <a:endParaRPr lang="en-GB" sz="1200" b="0" u="none" strike="noStrike">
+                        <a:solidFill>
+                          <a:srgbClr val="FFFFFF"/>
                         </a:solidFill>
                         <a:effectLst/>
                         <a:uFillTx/>
@@ -4549,7 +4228,7 @@
         <p:spPr>
           <a:xfrm>
             <a:off x="5943600" y="-457200"/>
-            <a:ext cx="4571280" cy="4571280"/>
+            <a:ext cx="4570920" cy="4570920"/>
           </a:xfrm>
           <a:prstGeom prst="ellipse">
             <a:avLst/>
@@ -4597,7 +4276,7 @@
         <p:spPr>
           <a:xfrm>
             <a:off x="-1371600" y="2560320"/>
-            <a:ext cx="3656880" cy="3656880"/>
+            <a:ext cx="3656520" cy="3656520"/>
           </a:xfrm>
           <a:prstGeom prst="ellipse">
             <a:avLst/>
@@ -4645,7 +4324,7 @@
         <p:spPr>
           <a:xfrm>
             <a:off x="457200" y="274320"/>
-            <a:ext cx="8228880" cy="593640"/>
+            <a:ext cx="8228520" cy="593280"/>
           </a:xfrm>
           <a:prstGeom prst="rect">
             <a:avLst/>
@@ -4706,7 +4385,7 @@
         <p:spPr>
           <a:xfrm>
             <a:off x="365760" y="1097280"/>
-            <a:ext cx="4159800" cy="1078200"/>
+            <a:ext cx="4159440" cy="1077840"/>
           </a:xfrm>
           <a:prstGeom prst="roundRect">
             <a:avLst>
@@ -4761,7 +4440,7 @@
         <p:spPr>
           <a:xfrm>
             <a:off x="475560" y="1207080"/>
-            <a:ext cx="410760" cy="410760"/>
+            <a:ext cx="410400" cy="410400"/>
           </a:xfrm>
           <a:prstGeom prst="rect">
             <a:avLst/>
@@ -4822,7 +4501,7 @@
         <p:spPr>
           <a:xfrm>
             <a:off x="932760" y="1188720"/>
-            <a:ext cx="3474000" cy="346680"/>
+            <a:ext cx="3473640" cy="346320"/>
           </a:xfrm>
           <a:prstGeom prst="rect">
             <a:avLst/>
@@ -4883,7 +4562,7 @@
         <p:spPr>
           <a:xfrm>
             <a:off x="932760" y="1536120"/>
-            <a:ext cx="3474000" cy="502200"/>
+            <a:ext cx="3473640" cy="501840"/>
           </a:xfrm>
           <a:prstGeom prst="rect">
             <a:avLst/>
@@ -4944,7 +4623,7 @@
         <p:spPr>
           <a:xfrm>
             <a:off x="4800600" y="1097280"/>
-            <a:ext cx="4159800" cy="1078200"/>
+            <a:ext cx="4159440" cy="1077840"/>
           </a:xfrm>
           <a:prstGeom prst="roundRect">
             <a:avLst>
@@ -4999,7 +4678,7 @@
         <p:spPr>
           <a:xfrm>
             <a:off x="4910400" y="1207080"/>
-            <a:ext cx="410760" cy="410760"/>
+            <a:ext cx="410400" cy="410400"/>
           </a:xfrm>
           <a:prstGeom prst="rect">
             <a:avLst/>
@@ -5060,7 +4739,7 @@
         <p:spPr>
           <a:xfrm>
             <a:off x="5367600" y="1188720"/>
-            <a:ext cx="3474000" cy="346680"/>
+            <a:ext cx="3473640" cy="346320"/>
           </a:xfrm>
           <a:prstGeom prst="rect">
             <a:avLst/>
@@ -5121,7 +4800,7 @@
         <p:spPr>
           <a:xfrm>
             <a:off x="5367600" y="1536120"/>
-            <a:ext cx="3474000" cy="502200"/>
+            <a:ext cx="3473640" cy="501840"/>
           </a:xfrm>
           <a:prstGeom prst="rect">
             <a:avLst/>
@@ -5182,7 +4861,7 @@
         <p:spPr>
           <a:xfrm>
             <a:off x="365760" y="2331720"/>
-            <a:ext cx="4159800" cy="1078200"/>
+            <a:ext cx="4159440" cy="1077840"/>
           </a:xfrm>
           <a:prstGeom prst="roundRect">
             <a:avLst>
@@ -5237,7 +4916,7 @@
         <p:spPr>
           <a:xfrm>
             <a:off x="475560" y="2441520"/>
-            <a:ext cx="410760" cy="410760"/>
+            <a:ext cx="410400" cy="410400"/>
           </a:xfrm>
           <a:prstGeom prst="rect">
             <a:avLst/>
@@ -5298,7 +4977,7 @@
         <p:spPr>
           <a:xfrm>
             <a:off x="932760" y="2423160"/>
-            <a:ext cx="3474000" cy="346680"/>
+            <a:ext cx="3473640" cy="346320"/>
           </a:xfrm>
           <a:prstGeom prst="rect">
             <a:avLst/>
@@ -5359,7 +5038,7 @@
         <p:spPr>
           <a:xfrm>
             <a:off x="932760" y="2770560"/>
-            <a:ext cx="3474000" cy="502200"/>
+            <a:ext cx="3473640" cy="501840"/>
           </a:xfrm>
           <a:prstGeom prst="rect">
             <a:avLst/>
@@ -5420,7 +5099,7 @@
         <p:spPr>
           <a:xfrm>
             <a:off x="4800600" y="2331720"/>
-            <a:ext cx="4159800" cy="1078200"/>
+            <a:ext cx="4159440" cy="1077840"/>
           </a:xfrm>
           <a:prstGeom prst="roundRect">
             <a:avLst>
@@ -5475,7 +5154,7 @@
         <p:spPr>
           <a:xfrm>
             <a:off x="4910400" y="2441520"/>
-            <a:ext cx="410760" cy="410760"/>
+            <a:ext cx="410400" cy="410400"/>
           </a:xfrm>
           <a:prstGeom prst="rect">
             <a:avLst/>
@@ -5536,7 +5215,7 @@
         <p:spPr>
           <a:xfrm>
             <a:off x="5367600" y="2423160"/>
-            <a:ext cx="3474000" cy="346680"/>
+            <a:ext cx="3473640" cy="346320"/>
           </a:xfrm>
           <a:prstGeom prst="rect">
             <a:avLst/>
@@ -5597,7 +5276,7 @@
         <p:spPr>
           <a:xfrm>
             <a:off x="5367600" y="2770560"/>
-            <a:ext cx="3474000" cy="502200"/>
+            <a:ext cx="3473640" cy="501840"/>
           </a:xfrm>
           <a:prstGeom prst="rect">
             <a:avLst/>
@@ -5658,7 +5337,7 @@
         <p:spPr>
           <a:xfrm>
             <a:off x="365760" y="3566160"/>
-            <a:ext cx="4159800" cy="1078200"/>
+            <a:ext cx="4159440" cy="1077840"/>
           </a:xfrm>
           <a:prstGeom prst="roundRect">
             <a:avLst>
@@ -5713,7 +5392,7 @@
         <p:spPr>
           <a:xfrm>
             <a:off x="475560" y="3675960"/>
-            <a:ext cx="410760" cy="410760"/>
+            <a:ext cx="410400" cy="410400"/>
           </a:xfrm>
           <a:prstGeom prst="rect">
             <a:avLst/>
@@ -5774,7 +5453,7 @@
         <p:spPr>
           <a:xfrm>
             <a:off x="932760" y="3657600"/>
-            <a:ext cx="3474000" cy="346680"/>
+            <a:ext cx="3473640" cy="346320"/>
           </a:xfrm>
           <a:prstGeom prst="rect">
             <a:avLst/>
@@ -5835,7 +5514,7 @@
         <p:spPr>
           <a:xfrm>
             <a:off x="932760" y="4005000"/>
-            <a:ext cx="3474000" cy="502200"/>
+            <a:ext cx="3473640" cy="501840"/>
           </a:xfrm>
           <a:prstGeom prst="rect">
             <a:avLst/>
@@ -5896,7 +5575,7 @@
         <p:spPr>
           <a:xfrm>
             <a:off x="4800600" y="3566160"/>
-            <a:ext cx="4159800" cy="1078200"/>
+            <a:ext cx="4159440" cy="1077840"/>
           </a:xfrm>
           <a:prstGeom prst="roundRect">
             <a:avLst>
@@ -5951,7 +5630,7 @@
         <p:spPr>
           <a:xfrm>
             <a:off x="4910400" y="3675960"/>
-            <a:ext cx="410760" cy="410760"/>
+            <a:ext cx="410400" cy="410400"/>
           </a:xfrm>
           <a:prstGeom prst="rect">
             <a:avLst/>
@@ -6012,7 +5691,7 @@
         <p:spPr>
           <a:xfrm>
             <a:off x="5367600" y="3657600"/>
-            <a:ext cx="3474000" cy="346680"/>
+            <a:ext cx="3473640" cy="346320"/>
           </a:xfrm>
           <a:prstGeom prst="rect">
             <a:avLst/>
@@ -6073,7 +5752,7 @@
         <p:spPr>
           <a:xfrm>
             <a:off x="5367600" y="4005000"/>
-            <a:ext cx="3474000" cy="502200"/>
+            <a:ext cx="3473640" cy="501840"/>
           </a:xfrm>
           <a:prstGeom prst="rect">
             <a:avLst/>
@@ -6171,7 +5850,7 @@
         <p:spPr>
           <a:xfrm>
             <a:off x="457200" y="1371600"/>
-            <a:ext cx="8228880" cy="1096560"/>
+            <a:ext cx="8228520" cy="1096200"/>
           </a:xfrm>
           <a:prstGeom prst="rect">
             <a:avLst/>
@@ -6275,7 +5954,7 @@
         <p:spPr>
           <a:xfrm>
             <a:off x="457200" y="3252960"/>
-            <a:ext cx="8228880" cy="346680"/>
+            <a:ext cx="8228520" cy="346320"/>
           </a:xfrm>
           <a:prstGeom prst="rect">
             <a:avLst/>
@@ -6314,7 +5993,7 @@
                 <a:latin typeface="Courier New"/>
                 <a:ea typeface="Courier New"/>
               </a:rPr>
-              <a:t>GitHub: ATmega32_PWM_DC_Motor_Control</a:t>
+              <a:t>GitHub: https://github.com/realnissa/ATmega32_PWM_DC_Motor_Control</a:t>
             </a:r>
             <a:endParaRPr lang="en-GB" sz="1300" b="0" u="none" strike="noStrike">
               <a:solidFill>
@@ -6373,7 +6052,7 @@
         <p:spPr>
           <a:xfrm>
             <a:off x="457200" y="255960"/>
-            <a:ext cx="8228880" cy="593640"/>
+            <a:ext cx="8228520" cy="593280"/>
           </a:xfrm>
           <a:prstGeom prst="rect">
             <a:avLst/>
@@ -6412,43 +6091,7 @@
                 <a:latin typeface="Arial"/>
                 <a:ea typeface="Arial"/>
               </a:rPr>
-              <a:t>Projec</a:t>
-            </a:r>
-            <a:r>
-              <a:rPr lang="en-US" sz="3000" b="1" u="none" strike="noStrike">
-                <a:solidFill>
-                  <a:srgbClr val="1A1A2E"/>
-                </a:solidFill>
-                <a:effectLst/>
-                <a:uFillTx/>
-                <a:latin typeface="Arial"/>
-                <a:ea typeface="Arial"/>
-              </a:rPr>
-              <a:t>t </a:t>
-            </a:r>
-            <a:r>
-              <a:rPr lang="en-US" sz="3000" b="1" u="none" strike="noStrike">
-                <a:solidFill>
-                  <a:srgbClr val="1A1A2E"/>
-                </a:solidFill>
-                <a:effectLst/>
-                <a:uFillTx/>
-                <a:latin typeface="Arial"/>
-                <a:ea typeface="Arial"/>
-              </a:rPr>
-              <a:t>Overv</a:t>
-            </a:r>
-            <a:r>
-              <a:rPr lang="en-US" sz="3000" b="1" u="none" strike="noStrike">
-                <a:solidFill>
-                  <a:srgbClr val="1A1A2E"/>
-                </a:solidFill>
-                <a:effectLst/>
-                <a:uFillTx/>
-                <a:latin typeface="Arial"/>
-                <a:ea typeface="Arial"/>
-              </a:rPr>
-              <a:t>iew</a:t>
+              <a:t>Project Overview</a:t>
             </a:r>
             <a:endParaRPr lang="en-GB" sz="3000" b="0" u="none" strike="noStrike">
               <a:solidFill>
@@ -6513,7 +6156,7 @@
         <p:spPr>
           <a:xfrm>
             <a:off x="365760" y="1097280"/>
-            <a:ext cx="3931200" cy="959400"/>
+            <a:ext cx="3930840" cy="959040"/>
           </a:xfrm>
           <a:prstGeom prst="roundRect">
             <a:avLst>
@@ -6568,7 +6211,7 @@
         <p:spPr>
           <a:xfrm>
             <a:off x="548640" y="1152000"/>
-            <a:ext cx="3656880" cy="319320"/>
+            <a:ext cx="3656520" cy="318960"/>
           </a:xfrm>
           <a:prstGeom prst="rect">
             <a:avLst/>
@@ -6629,7 +6272,7 @@
         <p:spPr>
           <a:xfrm>
             <a:off x="548640" y="1463040"/>
-            <a:ext cx="3656880" cy="502200"/>
+            <a:ext cx="3656520" cy="501840"/>
           </a:xfrm>
           <a:prstGeom prst="rect">
             <a:avLst/>
@@ -6668,19 +6311,7 @@
                 <a:latin typeface="Arial"/>
                 <a:ea typeface="Arial"/>
               </a:rPr>
-              <a:t>Design and implement a PWM-based DC motor speed control system using the ATmega32, with push-button speed control and </a:t>
-            </a:r>
-            <a:r>
-              <a:rPr lang="en-US" sz="1100" b="0" u="none" strike="noStrike">
-                <a:solidFill>
-                  <a:srgbClr val="1A1A2E"/>
-                </a:solidFill>
-                <a:effectLst/>
-                <a:uFillTx/>
-                <a:latin typeface="Arial"/>
-                <a:ea typeface="Arial"/>
-              </a:rPr>
-              <a:t>LED level indicators.</a:t>
+              <a:t>Design and implement a PWM-based DC motor speed control system using the ATmega32, with push-button speed control and LED level indicators.</a:t>
             </a:r>
             <a:endParaRPr lang="en-GB" sz="1100" b="0" u="none" strike="noStrike">
               <a:solidFill>
@@ -6702,7 +6333,7 @@
         <p:spPr>
           <a:xfrm>
             <a:off x="4572000" y="1097280"/>
-            <a:ext cx="4205520" cy="959400"/>
+            <a:ext cx="4205160" cy="959040"/>
           </a:xfrm>
           <a:prstGeom prst="roundRect">
             <a:avLst>
@@ -6757,7 +6388,7 @@
         <p:spPr>
           <a:xfrm>
             <a:off x="4754880" y="1152000"/>
-            <a:ext cx="3839760" cy="319320"/>
+            <a:ext cx="3839400" cy="318960"/>
           </a:xfrm>
           <a:prstGeom prst="rect">
             <a:avLst/>
@@ -6818,7 +6449,7 @@
         <p:spPr>
           <a:xfrm>
             <a:off x="4754880" y="1463040"/>
-            <a:ext cx="3839760" cy="502200"/>
+            <a:ext cx="3839400" cy="501840"/>
           </a:xfrm>
           <a:prstGeom prst="rect">
             <a:avLst/>
@@ -6859,19 +6490,7 @@
                 <a:latin typeface="Arial"/>
                 <a:ea typeface="Arial"/>
               </a:rPr>
-              <a:t>PWM output: Timer0 / </a:t>
-            </a:r>
-            <a:r>
-              <a:rPr lang="en-US" sz="1000" b="0" u="none" strike="noStrike">
-                <a:solidFill>
-                  <a:srgbClr val="1A1A2E"/>
-                </a:solidFill>
-                <a:effectLst/>
-                <a:uFillTx/>
-                <a:latin typeface="Arial"/>
-                <a:ea typeface="Arial"/>
-              </a:rPr>
-              <a:t>OC0 / PB3</a:t>
+              <a:t>PWM output: Timer0 / OC0 / PB3</a:t>
             </a:r>
             <a:endParaRPr lang="en-GB" sz="1000" b="0" u="none" strike="noStrike">
               <a:solidFill>
@@ -6903,19 +6522,7 @@
                 <a:latin typeface="Arial"/>
                 <a:ea typeface="Arial"/>
               </a:rPr>
-              <a:t>5 speed levels: 0%, </a:t>
-            </a:r>
-            <a:r>
-              <a:rPr lang="en-US" sz="1000" b="0" u="none" strike="noStrike">
-                <a:solidFill>
-                  <a:srgbClr val="1A1A2E"/>
-                </a:solidFill>
-                <a:effectLst/>
-                <a:uFillTx/>
-                <a:latin typeface="Arial"/>
-                <a:ea typeface="Arial"/>
-              </a:rPr>
-              <a:t>25%, 50%, 75%, 100%</a:t>
+              <a:t>5 speed levels: 0%, 25%, 50%, 75%, 100%</a:t>
             </a:r>
             <a:endParaRPr lang="en-GB" sz="1000" b="0" u="none" strike="noStrike">
               <a:solidFill>
@@ -6947,19 +6554,7 @@
                 <a:latin typeface="Arial"/>
                 <a:ea typeface="Arial"/>
               </a:rPr>
-              <a:t>External 8 MHz crystal </a:t>
-            </a:r>
-            <a:r>
-              <a:rPr lang="en-US" sz="1000" b="0" u="none" strike="noStrike">
-                <a:solidFill>
-                  <a:srgbClr val="1A1A2E"/>
-                </a:solidFill>
-                <a:effectLst/>
-                <a:uFillTx/>
-                <a:latin typeface="Arial"/>
-                <a:ea typeface="Arial"/>
-              </a:rPr>
-              <a:t>clock source</a:t>
+              <a:t>External 8 MHz crystal clock source</a:t>
             </a:r>
             <a:endParaRPr lang="en-GB" sz="1000" b="0" u="none" strike="noStrike">
               <a:solidFill>
@@ -6981,7 +6576,7 @@
         <p:spPr>
           <a:xfrm>
             <a:off x="365760" y="2240280"/>
-            <a:ext cx="1919520" cy="1005120"/>
+            <a:ext cx="1919160" cy="1004760"/>
           </a:xfrm>
           <a:prstGeom prst="roundRect">
             <a:avLst>
@@ -7036,7 +6631,7 @@
         <p:spPr>
           <a:xfrm>
             <a:off x="365760" y="2350080"/>
-            <a:ext cx="1919520" cy="328320"/>
+            <a:ext cx="1919160" cy="327960"/>
           </a:xfrm>
           <a:prstGeom prst="rect">
             <a:avLst/>
@@ -7075,139 +6670,7 @@
                 <a:latin typeface="Arial"/>
                 <a:ea typeface="Arial"/>
               </a:rPr>
-              <a:t>P</a:t>
-            </a:r>
-            <a:r>
-              <a:rPr lang="en-US" sz="1200" b="1" u="none" strike="noStrike">
-                <a:solidFill>
-                  <a:srgbClr val="FFFFFF"/>
-                </a:solidFill>
-                <a:effectLst/>
-                <a:uFillTx/>
-                <a:latin typeface="Arial"/>
-                <a:ea typeface="Arial"/>
-              </a:rPr>
-              <a:t>u</a:t>
-            </a:r>
-            <a:r>
-              <a:rPr lang="en-US" sz="1200" b="1" u="none" strike="noStrike">
-                <a:solidFill>
-                  <a:srgbClr val="FFFFFF"/>
-                </a:solidFill>
-                <a:effectLst/>
-                <a:uFillTx/>
-                <a:latin typeface="Arial"/>
-                <a:ea typeface="Arial"/>
-              </a:rPr>
-              <a:t>s</a:t>
-            </a:r>
-            <a:r>
-              <a:rPr lang="en-US" sz="1200" b="1" u="none" strike="noStrike">
-                <a:solidFill>
-                  <a:srgbClr val="FFFFFF"/>
-                </a:solidFill>
-                <a:effectLst/>
-                <a:uFillTx/>
-                <a:latin typeface="Arial"/>
-                <a:ea typeface="Arial"/>
-              </a:rPr>
-              <a:t>h</a:t>
-            </a:r>
-            <a:r>
-              <a:rPr lang="en-US" sz="1200" b="1" u="none" strike="noStrike">
-                <a:solidFill>
-                  <a:srgbClr val="FFFFFF"/>
-                </a:solidFill>
-                <a:effectLst/>
-                <a:uFillTx/>
-                <a:latin typeface="Arial"/>
-                <a:ea typeface="Arial"/>
-              </a:rPr>
-              <a:t> </a:t>
-            </a:r>
-            <a:r>
-              <a:rPr lang="en-US" sz="1200" b="1" u="none" strike="noStrike">
-                <a:solidFill>
-                  <a:srgbClr val="FFFFFF"/>
-                </a:solidFill>
-                <a:effectLst/>
-                <a:uFillTx/>
-                <a:latin typeface="Arial"/>
-                <a:ea typeface="Arial"/>
-              </a:rPr>
-              <a:t>B</a:t>
-            </a:r>
-            <a:r>
-              <a:rPr lang="en-US" sz="1200" b="1" u="none" strike="noStrike">
-                <a:solidFill>
-                  <a:srgbClr val="FFFFFF"/>
-                </a:solidFill>
-                <a:effectLst/>
-                <a:uFillTx/>
-                <a:latin typeface="Arial"/>
-                <a:ea typeface="Arial"/>
-              </a:rPr>
-              <a:t>u</a:t>
-            </a:r>
-            <a:r>
-              <a:rPr lang="en-US" sz="1200" b="1" u="none" strike="noStrike">
-                <a:solidFill>
-                  <a:srgbClr val="FFFFFF"/>
-                </a:solidFill>
-                <a:effectLst/>
-                <a:uFillTx/>
-                <a:latin typeface="Arial"/>
-                <a:ea typeface="Arial"/>
-              </a:rPr>
-              <a:t>t</a:t>
-            </a:r>
-            <a:r>
-              <a:rPr lang="en-US" sz="1200" b="1" u="none" strike="noStrike">
-                <a:solidFill>
-                  <a:srgbClr val="FFFFFF"/>
-                </a:solidFill>
-                <a:effectLst/>
-                <a:uFillTx/>
-                <a:latin typeface="Arial"/>
-                <a:ea typeface="Arial"/>
-              </a:rPr>
-              <a:t>t</a:t>
-            </a:r>
-            <a:r>
-              <a:rPr lang="en-US" sz="1200" b="1" u="none" strike="noStrike">
-                <a:solidFill>
-                  <a:srgbClr val="FFFFFF"/>
-                </a:solidFill>
-                <a:effectLst/>
-                <a:uFillTx/>
-                <a:latin typeface="Arial"/>
-                <a:ea typeface="Arial"/>
-              </a:rPr>
-              <a:t>o</a:t>
-            </a:r>
-            <a:r>
-              <a:rPr lang="en-US" sz="1200" b="1" u="none" strike="noStrike">
-                <a:solidFill>
-                  <a:srgbClr val="FFFFFF"/>
-                </a:solidFill>
-                <a:effectLst/>
-                <a:uFillTx/>
-                <a:latin typeface="Arial"/>
-                <a:ea typeface="Arial"/>
-              </a:rPr>
-              <a:t>n</a:t>
-            </a:r>
-            <a:r>
-              <a:rPr lang="en-US" sz="1200" b="1" u="none" strike="noStrike">
-                <a:solidFill>
-                  <a:srgbClr val="FFFFFF"/>
-                </a:solidFill>
-                <a:effectLst/>
-                <a:uFillTx/>
-                <a:latin typeface="Arial"/>
-                <a:ea typeface="Arial"/>
-              </a:rPr>
-              <a:t>s</a:t>
+              <a:t>Push Buttons</a:t>
             </a:r>
             <a:endParaRPr lang="en-GB" sz="1200" b="0" u="none" strike="noStrike">
               <a:solidFill>
@@ -7229,7 +6692,7 @@
         <p:spPr>
           <a:xfrm>
             <a:off x="365760" y="2660760"/>
-            <a:ext cx="1919520" cy="255240"/>
+            <a:ext cx="1919160" cy="254880"/>
           </a:xfrm>
           <a:prstGeom prst="rect">
             <a:avLst/>
@@ -7333,7 +6796,7 @@
         <p:spPr>
           <a:xfrm>
             <a:off x="2514600" y="2240280"/>
-            <a:ext cx="1919520" cy="1005120"/>
+            <a:ext cx="1919160" cy="1004760"/>
           </a:xfrm>
           <a:prstGeom prst="roundRect">
             <a:avLst>
@@ -7388,7 +6851,7 @@
         <p:spPr>
           <a:xfrm>
             <a:off x="2514600" y="2350080"/>
-            <a:ext cx="1919520" cy="328320"/>
+            <a:ext cx="1919160" cy="327960"/>
           </a:xfrm>
           <a:prstGeom prst="rect">
             <a:avLst/>
@@ -7449,7 +6912,7 @@
         <p:spPr>
           <a:xfrm>
             <a:off x="2514600" y="2660760"/>
-            <a:ext cx="1919520" cy="255240"/>
+            <a:ext cx="1919160" cy="254880"/>
           </a:xfrm>
           <a:prstGeom prst="rect">
             <a:avLst/>
@@ -7553,7 +7016,7 @@
         <p:spPr>
           <a:xfrm>
             <a:off x="4663440" y="2240280"/>
-            <a:ext cx="1919520" cy="1005120"/>
+            <a:ext cx="1919160" cy="1004760"/>
           </a:xfrm>
           <a:prstGeom prst="roundRect">
             <a:avLst>
@@ -7608,7 +7071,7 @@
         <p:spPr>
           <a:xfrm>
             <a:off x="4663440" y="2350080"/>
-            <a:ext cx="1919520" cy="328320"/>
+            <a:ext cx="1919160" cy="327960"/>
           </a:xfrm>
           <a:prstGeom prst="rect">
             <a:avLst/>
@@ -7669,7 +7132,7 @@
         <p:spPr>
           <a:xfrm>
             <a:off x="4663440" y="2660760"/>
-            <a:ext cx="1919520" cy="255240"/>
+            <a:ext cx="1919160" cy="254880"/>
           </a:xfrm>
           <a:prstGeom prst="rect">
             <a:avLst/>
@@ -7773,7 +7236,7 @@
         <p:spPr>
           <a:xfrm>
             <a:off x="6812280" y="2240280"/>
-            <a:ext cx="1919520" cy="1005120"/>
+            <a:ext cx="1919160" cy="1004760"/>
           </a:xfrm>
           <a:prstGeom prst="roundRect">
             <a:avLst>
@@ -7828,7 +7291,7 @@
         <p:spPr>
           <a:xfrm>
             <a:off x="6812280" y="2350080"/>
-            <a:ext cx="1919520" cy="328320"/>
+            <a:ext cx="1919160" cy="327960"/>
           </a:xfrm>
           <a:prstGeom prst="rect">
             <a:avLst/>
@@ -7889,7 +7352,7 @@
         <p:spPr>
           <a:xfrm>
             <a:off x="6812280" y="2660760"/>
-            <a:ext cx="1919520" cy="255240"/>
+            <a:ext cx="1919160" cy="254880"/>
           </a:xfrm>
           <a:prstGeom prst="rect">
             <a:avLst/>
@@ -7950,7 +7413,7 @@
         <p:spPr>
           <a:xfrm>
             <a:off x="365760" y="3429000"/>
-            <a:ext cx="8411760" cy="1370880"/>
+            <a:ext cx="8411400" cy="1370520"/>
           </a:xfrm>
           <a:prstGeom prst="roundRect">
             <a:avLst>
@@ -8005,7 +7468,7 @@
         <p:spPr>
           <a:xfrm>
             <a:off x="548640" y="3493080"/>
-            <a:ext cx="4571280" cy="319320"/>
+            <a:ext cx="4570920" cy="318960"/>
           </a:xfrm>
           <a:prstGeom prst="rect">
             <a:avLst/>
@@ -8066,7 +7529,7 @@
         <p:spPr>
           <a:xfrm>
             <a:off x="1005840" y="3767400"/>
-            <a:ext cx="410760" cy="410760"/>
+            <a:ext cx="410400" cy="410400"/>
           </a:xfrm>
           <a:prstGeom prst="ellipse">
             <a:avLst/>
@@ -8112,7 +7575,7 @@
         <p:spPr>
           <a:xfrm>
             <a:off x="502920" y="4224600"/>
-            <a:ext cx="1645200" cy="456480"/>
+            <a:ext cx="1644840" cy="456120"/>
           </a:xfrm>
           <a:prstGeom prst="rect">
             <a:avLst/>
@@ -8203,7 +7666,7 @@
         <p:spPr>
           <a:xfrm>
             <a:off x="2670120" y="3767400"/>
-            <a:ext cx="410760" cy="410760"/>
+            <a:ext cx="410400" cy="410400"/>
           </a:xfrm>
           <a:prstGeom prst="ellipse">
             <a:avLst/>
@@ -8249,7 +7712,7 @@
         <p:spPr>
           <a:xfrm>
             <a:off x="2167200" y="4224600"/>
-            <a:ext cx="1645200" cy="456480"/>
+            <a:ext cx="1644840" cy="456120"/>
           </a:xfrm>
           <a:prstGeom prst="rect">
             <a:avLst/>
@@ -8340,7 +7803,7 @@
         <p:spPr>
           <a:xfrm>
             <a:off x="4334400" y="3767400"/>
-            <a:ext cx="410760" cy="410760"/>
+            <a:ext cx="410400" cy="410400"/>
           </a:xfrm>
           <a:prstGeom prst="ellipse">
             <a:avLst/>
@@ -8386,7 +7849,7 @@
         <p:spPr>
           <a:xfrm>
             <a:off x="3831480" y="4224600"/>
-            <a:ext cx="1645200" cy="456480"/>
+            <a:ext cx="1644840" cy="456120"/>
           </a:xfrm>
           <a:prstGeom prst="rect">
             <a:avLst/>
@@ -8477,7 +7940,7 @@
         <p:spPr>
           <a:xfrm>
             <a:off x="5998320" y="3767400"/>
-            <a:ext cx="410760" cy="410760"/>
+            <a:ext cx="410400" cy="410400"/>
           </a:xfrm>
           <a:prstGeom prst="ellipse">
             <a:avLst/>
@@ -8523,7 +7986,7 @@
         <p:spPr>
           <a:xfrm>
             <a:off x="5495400" y="4224600"/>
-            <a:ext cx="1645200" cy="456480"/>
+            <a:ext cx="1644840" cy="456120"/>
           </a:xfrm>
           <a:prstGeom prst="rect">
             <a:avLst/>
@@ -8614,7 +8077,7 @@
         <p:spPr>
           <a:xfrm>
             <a:off x="7662600" y="3767400"/>
-            <a:ext cx="410760" cy="410760"/>
+            <a:ext cx="410400" cy="410400"/>
           </a:xfrm>
           <a:prstGeom prst="ellipse">
             <a:avLst/>
@@ -8660,7 +8123,7 @@
         <p:spPr>
           <a:xfrm>
             <a:off x="7159680" y="4224600"/>
-            <a:ext cx="1645200" cy="456480"/>
+            <a:ext cx="1644840" cy="456120"/>
           </a:xfrm>
           <a:prstGeom prst="rect">
             <a:avLst/>
@@ -8788,7 +8251,7 @@
         <p:spPr>
           <a:xfrm>
             <a:off x="180000" y="-54000"/>
-            <a:ext cx="8228880" cy="593640"/>
+            <a:ext cx="8228520" cy="593280"/>
           </a:xfrm>
           <a:prstGeom prst="rect">
             <a:avLst/>
@@ -8896,7 +8359,7 @@
         <p:spPr>
           <a:xfrm>
             <a:off x="0" y="540000"/>
-            <a:ext cx="9143640" cy="4603320"/>
+            <a:ext cx="9143280" cy="4602960"/>
           </a:xfrm>
           <a:prstGeom prst="rect">
             <a:avLst/>
@@ -8953,7 +8416,7 @@
         <p:spPr>
           <a:xfrm>
             <a:off x="230760" y="-54000"/>
-            <a:ext cx="8228880" cy="593640"/>
+            <a:ext cx="8228520" cy="593280"/>
           </a:xfrm>
           <a:prstGeom prst="rect">
             <a:avLst/>
@@ -9060,8 +8523,8 @@
         </p:blipFill>
         <p:spPr>
           <a:xfrm>
-            <a:off x="2520" y="0"/>
-            <a:ext cx="9177120" cy="5143320"/>
+            <a:off x="0" y="0"/>
+            <a:ext cx="9180000" cy="5143680"/>
           </a:xfrm>
           <a:prstGeom prst="rect">
             <a:avLst/>
@@ -9118,7 +8581,7 @@
         <p:spPr>
           <a:xfrm>
             <a:off x="230760" y="-54000"/>
-            <a:ext cx="8228880" cy="593640"/>
+            <a:ext cx="8228520" cy="593280"/>
           </a:xfrm>
           <a:prstGeom prst="rect">
             <a:avLst/>
@@ -9225,8 +8688,8 @@
         </p:blipFill>
         <p:spPr>
           <a:xfrm>
-            <a:off x="3960000" y="540000"/>
-            <a:ext cx="5183640" cy="4603320"/>
+            <a:off x="3959280" y="540000"/>
+            <a:ext cx="5220000" cy="4603680"/>
           </a:xfrm>
           <a:prstGeom prst="rect">
             <a:avLst/>
@@ -9249,8 +8712,8 @@
         </p:blipFill>
         <p:spPr>
           <a:xfrm>
-            <a:off x="0" y="539640"/>
-            <a:ext cx="3959640" cy="4603680"/>
+            <a:off x="0" y="540000"/>
+            <a:ext cx="3960000" cy="4603680"/>
           </a:xfrm>
           <a:prstGeom prst="rect">
             <a:avLst/>
@@ -9307,7 +8770,7 @@
         <p:spPr>
           <a:xfrm>
             <a:off x="457200" y="255960"/>
-            <a:ext cx="8228880" cy="593640"/>
+            <a:ext cx="8228520" cy="593280"/>
           </a:xfrm>
           <a:prstGeom prst="rect">
             <a:avLst/>
@@ -9411,7 +8874,7 @@
         <p:spPr>
           <a:xfrm>
             <a:off x="365760" y="1097280"/>
-            <a:ext cx="4022640" cy="3565440"/>
+            <a:ext cx="4022280" cy="3565080"/>
           </a:xfrm>
           <a:prstGeom prst="roundRect">
             <a:avLst>
@@ -9466,7 +8929,7 @@
         <p:spPr>
           <a:xfrm>
             <a:off x="548640" y="1170360"/>
-            <a:ext cx="3656880" cy="319320"/>
+            <a:ext cx="3656520" cy="318960"/>
           </a:xfrm>
           <a:prstGeom prst="rect">
             <a:avLst/>
@@ -9527,7 +8990,7 @@
         <p:spPr>
           <a:xfrm>
             <a:off x="502920" y="1536120"/>
-            <a:ext cx="3748320" cy="502200"/>
+            <a:ext cx="3747960" cy="501840"/>
           </a:xfrm>
           <a:prstGeom prst="rect">
             <a:avLst/>
@@ -9588,7 +9051,7 @@
         <p:spPr>
           <a:xfrm>
             <a:off x="548640" y="2148840"/>
-            <a:ext cx="3656880" cy="319320"/>
+            <a:ext cx="3656520" cy="318960"/>
           </a:xfrm>
           <a:prstGeom prst="rect">
             <a:avLst/>
@@ -11269,7 +10732,7 @@
         <p:spPr>
           <a:xfrm>
             <a:off x="4663440" y="1097280"/>
-            <a:ext cx="4114080" cy="3565440"/>
+            <a:ext cx="4113720" cy="3565080"/>
           </a:xfrm>
           <a:prstGeom prst="roundRect">
             <a:avLst>
@@ -11324,7 +10787,7 @@
         <p:spPr>
           <a:xfrm>
             <a:off x="4827960" y="1170360"/>
-            <a:ext cx="3748320" cy="319320"/>
+            <a:ext cx="3747960" cy="318960"/>
           </a:xfrm>
           <a:prstGeom prst="rect">
             <a:avLst/>
@@ -11385,7 +10848,7 @@
         <p:spPr>
           <a:xfrm>
             <a:off x="4754880" y="1600200"/>
-            <a:ext cx="3839760" cy="566280"/>
+            <a:ext cx="3839400" cy="565920"/>
           </a:xfrm>
           <a:prstGeom prst="roundRect">
             <a:avLst>
@@ -11435,7 +10898,7 @@
         <p:spPr>
           <a:xfrm>
             <a:off x="4846320" y="1645920"/>
-            <a:ext cx="1645200" cy="273600"/>
+            <a:ext cx="1644840" cy="273240"/>
           </a:xfrm>
           <a:prstGeom prst="rect">
             <a:avLst/>
@@ -11496,7 +10959,7 @@
         <p:spPr>
           <a:xfrm>
             <a:off x="6492240" y="1645920"/>
-            <a:ext cx="639360" cy="273600"/>
+            <a:ext cx="639000" cy="273240"/>
           </a:xfrm>
           <a:prstGeom prst="rect">
             <a:avLst/>
@@ -11557,7 +11020,7 @@
         <p:spPr>
           <a:xfrm>
             <a:off x="4846320" y="1892880"/>
-            <a:ext cx="3656880" cy="236880"/>
+            <a:ext cx="3656520" cy="236520"/>
           </a:xfrm>
           <a:prstGeom prst="rect">
             <a:avLst/>
@@ -11618,7 +11081,7 @@
         <p:spPr>
           <a:xfrm>
             <a:off x="4754880" y="2258640"/>
-            <a:ext cx="3839760" cy="566280"/>
+            <a:ext cx="3839400" cy="565920"/>
           </a:xfrm>
           <a:prstGeom prst="roundRect">
             <a:avLst>
@@ -11668,7 +11131,7 @@
         <p:spPr>
           <a:xfrm>
             <a:off x="4846320" y="2304360"/>
-            <a:ext cx="1645200" cy="273600"/>
+            <a:ext cx="1644840" cy="273240"/>
           </a:xfrm>
           <a:prstGeom prst="rect">
             <a:avLst/>
@@ -11729,7 +11192,7 @@
         <p:spPr>
           <a:xfrm>
             <a:off x="6492240" y="2304360"/>
-            <a:ext cx="639360" cy="273600"/>
+            <a:ext cx="639000" cy="273240"/>
           </a:xfrm>
           <a:prstGeom prst="rect">
             <a:avLst/>
@@ -11790,7 +11253,7 @@
         <p:spPr>
           <a:xfrm>
             <a:off x="4846320" y="2551320"/>
-            <a:ext cx="3656880" cy="236880"/>
+            <a:ext cx="3656520" cy="236520"/>
           </a:xfrm>
           <a:prstGeom prst="rect">
             <a:avLst/>
@@ -11851,7 +11314,7 @@
         <p:spPr>
           <a:xfrm>
             <a:off x="4754880" y="2917080"/>
-            <a:ext cx="3839760" cy="566280"/>
+            <a:ext cx="3839400" cy="565920"/>
           </a:xfrm>
           <a:prstGeom prst="roundRect">
             <a:avLst>
@@ -11901,7 +11364,7 @@
         <p:spPr>
           <a:xfrm>
             <a:off x="4846320" y="2962800"/>
-            <a:ext cx="1645200" cy="273600"/>
+            <a:ext cx="1644840" cy="273240"/>
           </a:xfrm>
           <a:prstGeom prst="rect">
             <a:avLst/>
@@ -11962,7 +11425,7 @@
         <p:spPr>
           <a:xfrm>
             <a:off x="6492240" y="2962800"/>
-            <a:ext cx="639360" cy="273600"/>
+            <a:ext cx="639000" cy="273240"/>
           </a:xfrm>
           <a:prstGeom prst="rect">
             <a:avLst/>
@@ -12023,7 +11486,7 @@
         <p:spPr>
           <a:xfrm>
             <a:off x="4846320" y="3209400"/>
-            <a:ext cx="3656880" cy="236880"/>
+            <a:ext cx="3656520" cy="236520"/>
           </a:xfrm>
           <a:prstGeom prst="rect">
             <a:avLst/>
@@ -12084,7 +11547,7 @@
         <p:spPr>
           <a:xfrm>
             <a:off x="4827960" y="3620880"/>
-            <a:ext cx="3748320" cy="319320"/>
+            <a:ext cx="3747960" cy="318960"/>
           </a:xfrm>
           <a:prstGeom prst="rect">
             <a:avLst/>
@@ -12145,7 +11608,7 @@
         <p:spPr>
           <a:xfrm>
             <a:off x="4754880" y="3931920"/>
-            <a:ext cx="3931200" cy="383400"/>
+            <a:ext cx="3930840" cy="383040"/>
           </a:xfrm>
           <a:prstGeom prst="rect">
             <a:avLst/>
@@ -12206,7 +11669,7 @@
         <p:spPr>
           <a:xfrm>
             <a:off x="4754880" y="4334400"/>
-            <a:ext cx="3931200" cy="273600"/>
+            <a:ext cx="3930840" cy="273240"/>
           </a:xfrm>
           <a:prstGeom prst="rect">
             <a:avLst/>
@@ -12304,7 +11767,7 @@
         <p:spPr>
           <a:xfrm>
             <a:off x="457200" y="255960"/>
-            <a:ext cx="8228880" cy="593640"/>
+            <a:ext cx="8228520" cy="593280"/>
           </a:xfrm>
           <a:prstGeom prst="rect">
             <a:avLst/>
@@ -12408,7 +11871,7 @@
         <p:spPr>
           <a:xfrm>
             <a:off x="365760" y="1097280"/>
-            <a:ext cx="4022640" cy="3565440"/>
+            <a:ext cx="4022280" cy="3565080"/>
           </a:xfrm>
           <a:prstGeom prst="roundRect">
             <a:avLst>
@@ -12463,7 +11926,7 @@
         <p:spPr>
           <a:xfrm>
             <a:off x="548640" y="1170360"/>
-            <a:ext cx="3656880" cy="319320"/>
+            <a:ext cx="3656520" cy="318960"/>
           </a:xfrm>
           <a:prstGeom prst="rect">
             <a:avLst/>
@@ -12524,7 +11987,7 @@
         <p:spPr>
           <a:xfrm>
             <a:off x="502920" y="1572840"/>
-            <a:ext cx="3748320" cy="2925360"/>
+            <a:ext cx="3747960" cy="2925000"/>
           </a:xfrm>
           <a:prstGeom prst="rect">
             <a:avLst/>
@@ -12885,7 +12348,7 @@
         <p:spPr>
           <a:xfrm>
             <a:off x="4705560" y="1080000"/>
-            <a:ext cx="4114080" cy="1979640"/>
+            <a:ext cx="4113720" cy="1979280"/>
           </a:xfrm>
           <a:prstGeom prst="roundRect">
             <a:avLst>
@@ -12940,7 +12403,7 @@
         <p:spPr>
           <a:xfrm>
             <a:off x="4827960" y="1170360"/>
-            <a:ext cx="3748320" cy="319320"/>
+            <a:ext cx="3747960" cy="318960"/>
           </a:xfrm>
           <a:prstGeom prst="rect">
             <a:avLst/>
@@ -13001,7 +12464,7 @@
         <p:spPr>
           <a:xfrm>
             <a:off x="4800600" y="1572840"/>
-            <a:ext cx="3839760" cy="1078200"/>
+            <a:ext cx="3839400" cy="1077840"/>
           </a:xfrm>
           <a:prstGeom prst="rect">
             <a:avLst/>
@@ -13248,7 +12711,7 @@
         <p:spPr>
           <a:xfrm>
             <a:off x="4680000" y="3180960"/>
-            <a:ext cx="4139640" cy="1962360"/>
+            <a:ext cx="4139280" cy="1962000"/>
           </a:xfrm>
           <a:prstGeom prst="roundRect">
             <a:avLst>
@@ -13303,7 +12766,7 @@
         <p:spPr>
           <a:xfrm>
             <a:off x="5220000" y="3100320"/>
-            <a:ext cx="3748320" cy="319320"/>
+            <a:ext cx="3747960" cy="318960"/>
           </a:xfrm>
           <a:prstGeom prst="rect">
             <a:avLst/>
@@ -13364,7 +12827,7 @@
         <p:spPr>
           <a:xfrm>
             <a:off x="4800600" y="3337560"/>
-            <a:ext cx="3839760" cy="1233720"/>
+            <a:ext cx="3839400" cy="1233360"/>
           </a:xfrm>
           <a:prstGeom prst="rect">
             <a:avLst/>
@@ -13592,7 +13055,7 @@
         <p:spPr>
           <a:xfrm>
             <a:off x="230760" y="0"/>
-            <a:ext cx="8228880" cy="593640"/>
+            <a:ext cx="8228520" cy="593280"/>
           </a:xfrm>
           <a:prstGeom prst="rect">
             <a:avLst/>
@@ -13696,7 +13159,7 @@
         <p:spPr>
           <a:xfrm>
             <a:off x="438840" y="3399120"/>
-            <a:ext cx="5211360" cy="200520"/>
+            <a:ext cx="5211000" cy="200160"/>
           </a:xfrm>
           <a:prstGeom prst="rect">
             <a:avLst/>
@@ -13737,7 +13200,7 @@
         <p:spPr>
           <a:xfrm>
             <a:off x="365760" y="3657600"/>
-            <a:ext cx="2742480" cy="319320"/>
+            <a:ext cx="2742120" cy="318960"/>
           </a:xfrm>
           <a:prstGeom prst="rect">
             <a:avLst/>
@@ -13780,9 +13243,9 @@
           <a:stretch/>
         </p:blipFill>
         <p:spPr>
-          <a:xfrm>
-            <a:off x="0" y="-540000"/>
-            <a:ext cx="9143640" cy="5939640"/>
+          <a:xfrm rot="6600">
+            <a:off x="534600" y="60840"/>
+            <a:ext cx="7657200" cy="5331600"/>
           </a:xfrm>
           <a:prstGeom prst="rect">
             <a:avLst/>
@@ -13839,7 +13302,7 @@
         <p:spPr>
           <a:xfrm>
             <a:off x="457200" y="255960"/>
-            <a:ext cx="8228880" cy="593640"/>
+            <a:ext cx="8228520" cy="593280"/>
           </a:xfrm>
           <a:prstGeom prst="rect">
             <a:avLst/>
@@ -13943,7 +13406,7 @@
         <p:spPr>
           <a:xfrm>
             <a:off x="365760" y="1188720"/>
-            <a:ext cx="8411760" cy="593640"/>
+            <a:ext cx="8411400" cy="593280"/>
           </a:xfrm>
           <a:prstGeom prst="roundRect">
             <a:avLst>
@@ -13998,7 +13461,7 @@
         <p:spPr>
           <a:xfrm>
             <a:off x="548640" y="1261800"/>
-            <a:ext cx="2193840" cy="438120"/>
+            <a:ext cx="2193480" cy="437760"/>
           </a:xfrm>
           <a:prstGeom prst="rect">
             <a:avLst/>
@@ -14059,7 +13522,7 @@
         <p:spPr>
           <a:xfrm>
             <a:off x="2834640" y="1261800"/>
-            <a:ext cx="5851440" cy="438120"/>
+            <a:ext cx="5851080" cy="437760"/>
           </a:xfrm>
           <a:prstGeom prst="rect">
             <a:avLst/>
@@ -14120,7 +13583,7 @@
         <p:spPr>
           <a:xfrm>
             <a:off x="365760" y="1901880"/>
-            <a:ext cx="8411760" cy="593640"/>
+            <a:ext cx="8411400" cy="593280"/>
           </a:xfrm>
           <a:prstGeom prst="roundRect">
             <a:avLst>
@@ -14175,7 +13638,7 @@
         <p:spPr>
           <a:xfrm>
             <a:off x="548640" y="1974960"/>
-            <a:ext cx="2193840" cy="438120"/>
+            <a:ext cx="2193480" cy="437760"/>
           </a:xfrm>
           <a:prstGeom prst="rect">
             <a:avLst/>
@@ -14236,7 +13699,7 @@
         <p:spPr>
           <a:xfrm>
             <a:off x="2834640" y="1974960"/>
-            <a:ext cx="5851440" cy="438120"/>
+            <a:ext cx="5851080" cy="437760"/>
           </a:xfrm>
           <a:prstGeom prst="rect">
             <a:avLst/>
@@ -14297,7 +13760,7 @@
         <p:spPr>
           <a:xfrm>
             <a:off x="365760" y="2615040"/>
-            <a:ext cx="8411760" cy="593640"/>
+            <a:ext cx="8411400" cy="593280"/>
           </a:xfrm>
           <a:prstGeom prst="roundRect">
             <a:avLst>
@@ -14352,7 +13815,7 @@
         <p:spPr>
           <a:xfrm>
             <a:off x="548640" y="2688480"/>
-            <a:ext cx="2193840" cy="438120"/>
+            <a:ext cx="2193480" cy="437760"/>
           </a:xfrm>
           <a:prstGeom prst="rect">
             <a:avLst/>
@@ -14413,7 +13876,7 @@
         <p:spPr>
           <a:xfrm>
             <a:off x="2834640" y="2688480"/>
-            <a:ext cx="5851440" cy="438120"/>
+            <a:ext cx="5851080" cy="437760"/>
           </a:xfrm>
           <a:prstGeom prst="rect">
             <a:avLst/>
@@ -14474,7 +13937,7 @@
         <p:spPr>
           <a:xfrm>
             <a:off x="365760" y="3328560"/>
-            <a:ext cx="8411760" cy="593640"/>
+            <a:ext cx="8411400" cy="593280"/>
           </a:xfrm>
           <a:prstGeom prst="roundRect">
             <a:avLst>
@@ -14529,7 +13992,7 @@
         <p:spPr>
           <a:xfrm>
             <a:off x="548640" y="3401640"/>
-            <a:ext cx="2193840" cy="438120"/>
+            <a:ext cx="2193480" cy="437760"/>
           </a:xfrm>
           <a:prstGeom prst="rect">
             <a:avLst/>
@@ -14590,7 +14053,7 @@
         <p:spPr>
           <a:xfrm>
             <a:off x="2834640" y="3401640"/>
-            <a:ext cx="5851440" cy="438120"/>
+            <a:ext cx="5851080" cy="437760"/>
           </a:xfrm>
           <a:prstGeom prst="rect">
             <a:avLst/>
@@ -14651,7 +14114,7 @@
         <p:spPr>
           <a:xfrm>
             <a:off x="365760" y="4041720"/>
-            <a:ext cx="8411760" cy="593640"/>
+            <a:ext cx="8411400" cy="593280"/>
           </a:xfrm>
           <a:prstGeom prst="roundRect">
             <a:avLst>
@@ -14706,7 +14169,7 @@
         <p:spPr>
           <a:xfrm>
             <a:off x="548640" y="4114800"/>
-            <a:ext cx="2193840" cy="438120"/>
+            <a:ext cx="2193480" cy="437760"/>
           </a:xfrm>
           <a:prstGeom prst="rect">
             <a:avLst/>
@@ -14767,7 +14230,7 @@
         <p:spPr>
           <a:xfrm>
             <a:off x="2834640" y="4114800"/>
-            <a:ext cx="5851440" cy="438120"/>
+            <a:ext cx="5851080" cy="437760"/>
           </a:xfrm>
           <a:prstGeom prst="rect">
             <a:avLst/>
@@ -14871,7 +14334,7 @@
         <p:spPr>
           <a:xfrm>
             <a:off x="457200" y="4818960"/>
-            <a:ext cx="8228880" cy="273600"/>
+            <a:ext cx="8228520" cy="273240"/>
           </a:xfrm>
           <a:prstGeom prst="rect">
             <a:avLst/>
